--- a/Pregrado/Investigacion en ciencia y tecnologia/Clases/Sesion 02 - MinCiencias · 6 líneas de Ingeniería · elección de línea/Presentacion.pptx
+++ b/Pregrado/Investigacion en ciencia y tecnologia/Clases/Sesion 02 - MinCiencias · 6 líneas de Ingeniería · elección de línea/Presentacion.pptx
@@ -3366,41 +3366,6 @@
           </a:p>
         </p:txBody>
       </p:sp>
-      <p:sp>
-        <p:nvSpPr>
-          <p:cNvPr id="7" name="TextBox 6"/>
-          <p:cNvSpPr txBox="1"/>
-          <p:nvPr/>
-        </p:nvSpPr>
-        <p:spPr>
-          <a:xfrm>
-            <a:off x="2194560" y="6446520"/>
-            <a:ext cx="5943600" cy="274320"/>
-          </a:xfrm>
-          <a:prstGeom prst="rect">
-            <a:avLst/>
-          </a:prstGeom>
-          <a:noFill/>
-        </p:spPr>
-        <p:txBody>
-          <a:bodyPr wrap="square" anchor="t" lIns="0" rIns="0" tIns="0" bIns="0">
-            <a:spAutoFit/>
-          </a:bodyPr>
-          <a:lstStyle/>
-          <a:p>
-            <a:pPr algn="l"/>
-            <a:r>
-              <a:rPr sz="1000" b="1" i="0">
-                <a:solidFill>
-                  <a:srgbClr val="8F989D"/>
-                </a:solidFill>
-                <a:latin typeface="Calibri"/>
-              </a:rPr>
-              <a:t>Inicio 5:10 pm</a:t>
-            </a:r>
-          </a:p>
-        </p:txBody>
-      </p:sp>
     </p:spTree>
   </p:cSld>
   <p:clrMapOvr>
@@ -3823,41 +3788,6 @@
         </p:nvSpPr>
         <p:spPr>
           <a:xfrm>
-            <a:off x="2194560" y="6446520"/>
-            <a:ext cx="5943600" cy="274320"/>
-          </a:xfrm>
-          <a:prstGeom prst="rect">
-            <a:avLst/>
-          </a:prstGeom>
-          <a:noFill/>
-        </p:spPr>
-        <p:txBody>
-          <a:bodyPr wrap="square" anchor="t" lIns="0" rIns="0" tIns="0" bIns="0">
-            <a:spAutoFit/>
-          </a:bodyPr>
-          <a:lstStyle/>
-          <a:p>
-            <a:pPr algn="l"/>
-            <a:r>
-              <a:rPr sz="1000" b="1" i="0">
-                <a:solidFill>
-                  <a:srgbClr val="8F989D"/>
-                </a:solidFill>
-                <a:latin typeface="Calibri"/>
-              </a:rPr>
-              <a:t>Inicio 5:10 pm</a:t>
-            </a:r>
-          </a:p>
-        </p:txBody>
-      </p:sp>
-      <p:sp>
-        <p:nvSpPr>
-          <p:cNvPr id="11" name="TextBox 10"/>
-          <p:cNvSpPr txBox="1"/>
-          <p:nvPr/>
-        </p:nvSpPr>
-        <p:spPr>
-          <a:xfrm>
             <a:off x="11094415" y="6446520"/>
             <a:ext cx="548640" cy="274320"/>
           </a:xfrm>
@@ -4191,41 +4121,6 @@
         </p:nvSpPr>
         <p:spPr>
           <a:xfrm>
-            <a:off x="2194560" y="6446520"/>
-            <a:ext cx="5943600" cy="274320"/>
-          </a:xfrm>
-          <a:prstGeom prst="rect">
-            <a:avLst/>
-          </a:prstGeom>
-          <a:noFill/>
-        </p:spPr>
-        <p:txBody>
-          <a:bodyPr wrap="square" anchor="t" lIns="0" rIns="0" tIns="0" bIns="0">
-            <a:spAutoFit/>
-          </a:bodyPr>
-          <a:lstStyle/>
-          <a:p>
-            <a:pPr algn="l"/>
-            <a:r>
-              <a:rPr sz="1000" b="1" i="0">
-                <a:solidFill>
-                  <a:srgbClr val="8F989D"/>
-                </a:solidFill>
-                <a:latin typeface="Calibri"/>
-              </a:rPr>
-              <a:t>Inicio 5:10 pm</a:t>
-            </a:r>
-          </a:p>
-        </p:txBody>
-      </p:sp>
-      <p:sp>
-        <p:nvSpPr>
-          <p:cNvPr id="7" name="TextBox 6"/>
-          <p:cNvSpPr txBox="1"/>
-          <p:nvPr/>
-        </p:nvSpPr>
-        <p:spPr>
-          <a:xfrm>
             <a:off x="11094415" y="6446520"/>
             <a:ext cx="548640" cy="274320"/>
           </a:xfrm>
@@ -4785,41 +4680,6 @@
         </p:nvSpPr>
         <p:spPr>
           <a:xfrm>
-            <a:off x="2194560" y="6446520"/>
-            <a:ext cx="5943600" cy="274320"/>
-          </a:xfrm>
-          <a:prstGeom prst="rect">
-            <a:avLst/>
-          </a:prstGeom>
-          <a:noFill/>
-        </p:spPr>
-        <p:txBody>
-          <a:bodyPr wrap="square" anchor="t" lIns="0" rIns="0" tIns="0" bIns="0">
-            <a:spAutoFit/>
-          </a:bodyPr>
-          <a:lstStyle/>
-          <a:p>
-            <a:pPr algn="l"/>
-            <a:r>
-              <a:rPr sz="1000" b="1" i="0">
-                <a:solidFill>
-                  <a:srgbClr val="8F989D"/>
-                </a:solidFill>
-                <a:latin typeface="Calibri"/>
-              </a:rPr>
-              <a:t>Inicio 5:10 pm</a:t>
-            </a:r>
-          </a:p>
-        </p:txBody>
-      </p:sp>
-      <p:sp>
-        <p:nvSpPr>
-          <p:cNvPr id="6" name="TextBox 5"/>
-          <p:cNvSpPr txBox="1"/>
-          <p:nvPr/>
-        </p:nvSpPr>
-        <p:spPr>
-          <a:xfrm>
             <a:off x="11094415" y="6446520"/>
             <a:ext cx="548640" cy="274320"/>
           </a:xfrm>
@@ -5035,41 +4895,6 @@
         </p:nvSpPr>
         <p:spPr>
           <a:xfrm>
-            <a:off x="2194560" y="6446520"/>
-            <a:ext cx="5943600" cy="274320"/>
-          </a:xfrm>
-          <a:prstGeom prst="rect">
-            <a:avLst/>
-          </a:prstGeom>
-          <a:noFill/>
-        </p:spPr>
-        <p:txBody>
-          <a:bodyPr wrap="square" anchor="t" lIns="0" rIns="0" tIns="0" bIns="0">
-            <a:spAutoFit/>
-          </a:bodyPr>
-          <a:lstStyle/>
-          <a:p>
-            <a:pPr algn="l"/>
-            <a:r>
-              <a:rPr sz="1000" b="1" i="0">
-                <a:solidFill>
-                  <a:srgbClr val="8F989D"/>
-                </a:solidFill>
-                <a:latin typeface="Calibri"/>
-              </a:rPr>
-              <a:t>Inicio 5:10 pm</a:t>
-            </a:r>
-          </a:p>
-        </p:txBody>
-      </p:sp>
-      <p:sp>
-        <p:nvSpPr>
-          <p:cNvPr id="6" name="TextBox 5"/>
-          <p:cNvSpPr txBox="1"/>
-          <p:nvPr/>
-        </p:nvSpPr>
-        <p:spPr>
-          <a:xfrm>
             <a:off x="11094415" y="6446520"/>
             <a:ext cx="548640" cy="274320"/>
           </a:xfrm>
@@ -5099,7 +4924,7 @@
       </p:sp>
       <p:sp>
         <p:nvSpPr>
-          <p:cNvPr id="7" name="TextBox 6"/>
+          <p:cNvPr id="6" name="TextBox 5"/>
           <p:cNvSpPr txBox="1"/>
           <p:nvPr/>
         </p:nvSpPr>
@@ -5537,41 +5362,6 @@
         </p:nvSpPr>
         <p:spPr>
           <a:xfrm>
-            <a:off x="2194560" y="6446520"/>
-            <a:ext cx="5943600" cy="274320"/>
-          </a:xfrm>
-          <a:prstGeom prst="rect">
-            <a:avLst/>
-          </a:prstGeom>
-          <a:noFill/>
-        </p:spPr>
-        <p:txBody>
-          <a:bodyPr wrap="square" anchor="t" lIns="0" rIns="0" tIns="0" bIns="0">
-            <a:spAutoFit/>
-          </a:bodyPr>
-          <a:lstStyle/>
-          <a:p>
-            <a:pPr algn="l"/>
-            <a:r>
-              <a:rPr sz="1000" b="1" i="0">
-                <a:solidFill>
-                  <a:srgbClr val="8F989D"/>
-                </a:solidFill>
-                <a:latin typeface="Calibri"/>
-              </a:rPr>
-              <a:t>Inicio 5:10 pm</a:t>
-            </a:r>
-          </a:p>
-        </p:txBody>
-      </p:sp>
-      <p:sp>
-        <p:nvSpPr>
-          <p:cNvPr id="6" name="TextBox 5"/>
-          <p:cNvSpPr txBox="1"/>
-          <p:nvPr/>
-        </p:nvSpPr>
-        <p:spPr>
-          <a:xfrm>
             <a:off x="11094415" y="6446520"/>
             <a:ext cx="548640" cy="274320"/>
           </a:xfrm>
@@ -5955,41 +5745,6 @@
         </p:nvSpPr>
         <p:spPr>
           <a:xfrm>
-            <a:off x="2194560" y="6446520"/>
-            <a:ext cx="5943600" cy="274320"/>
-          </a:xfrm>
-          <a:prstGeom prst="rect">
-            <a:avLst/>
-          </a:prstGeom>
-          <a:noFill/>
-        </p:spPr>
-        <p:txBody>
-          <a:bodyPr wrap="square" anchor="t" lIns="0" rIns="0" tIns="0" bIns="0">
-            <a:spAutoFit/>
-          </a:bodyPr>
-          <a:lstStyle/>
-          <a:p>
-            <a:pPr algn="l"/>
-            <a:r>
-              <a:rPr sz="1000" b="1" i="0">
-                <a:solidFill>
-                  <a:srgbClr val="8F989D"/>
-                </a:solidFill>
-                <a:latin typeface="Calibri"/>
-              </a:rPr>
-              <a:t>Inicio 5:10 pm</a:t>
-            </a:r>
-          </a:p>
-        </p:txBody>
-      </p:sp>
-      <p:sp>
-        <p:nvSpPr>
-          <p:cNvPr id="6" name="TextBox 5"/>
-          <p:cNvSpPr txBox="1"/>
-          <p:nvPr/>
-        </p:nvSpPr>
-        <p:spPr>
-          <a:xfrm>
             <a:off x="11094415" y="6446520"/>
             <a:ext cx="548640" cy="274320"/>
           </a:xfrm>
@@ -6515,41 +6270,6 @@
         </p:nvSpPr>
         <p:spPr>
           <a:xfrm>
-            <a:off x="2194560" y="6446520"/>
-            <a:ext cx="5943600" cy="274320"/>
-          </a:xfrm>
-          <a:prstGeom prst="rect">
-            <a:avLst/>
-          </a:prstGeom>
-          <a:noFill/>
-        </p:spPr>
-        <p:txBody>
-          <a:bodyPr wrap="square" anchor="t" lIns="0" rIns="0" tIns="0" bIns="0">
-            <a:spAutoFit/>
-          </a:bodyPr>
-          <a:lstStyle/>
-          <a:p>
-            <a:pPr algn="l"/>
-            <a:r>
-              <a:rPr sz="1000" b="1" i="0">
-                <a:solidFill>
-                  <a:srgbClr val="8F989D"/>
-                </a:solidFill>
-                <a:latin typeface="Calibri"/>
-              </a:rPr>
-              <a:t>Inicio 5:10 pm</a:t>
-            </a:r>
-          </a:p>
-        </p:txBody>
-      </p:sp>
-      <p:sp>
-        <p:nvSpPr>
-          <p:cNvPr id="6" name="TextBox 5"/>
-          <p:cNvSpPr txBox="1"/>
-          <p:nvPr/>
-        </p:nvSpPr>
-        <p:spPr>
-          <a:xfrm>
             <a:off x="11094415" y="6446520"/>
             <a:ext cx="548640" cy="274320"/>
           </a:xfrm>
@@ -6579,7 +6299,7 @@
       </p:sp>
       <p:sp>
         <p:nvSpPr>
-          <p:cNvPr id="7" name="TextBox 6"/>
+          <p:cNvPr id="6" name="TextBox 5"/>
           <p:cNvSpPr txBox="1"/>
           <p:nvPr/>
         </p:nvSpPr>
@@ -6981,41 +6701,6 @@
         </p:nvSpPr>
         <p:spPr>
           <a:xfrm>
-            <a:off x="2194560" y="6446520"/>
-            <a:ext cx="5943600" cy="274320"/>
-          </a:xfrm>
-          <a:prstGeom prst="rect">
-            <a:avLst/>
-          </a:prstGeom>
-          <a:noFill/>
-        </p:spPr>
-        <p:txBody>
-          <a:bodyPr wrap="square" anchor="t" lIns="0" rIns="0" tIns="0" bIns="0">
-            <a:spAutoFit/>
-          </a:bodyPr>
-          <a:lstStyle/>
-          <a:p>
-            <a:pPr algn="l"/>
-            <a:r>
-              <a:rPr sz="1000" b="1" i="0">
-                <a:solidFill>
-                  <a:srgbClr val="8F989D"/>
-                </a:solidFill>
-                <a:latin typeface="Calibri"/>
-              </a:rPr>
-              <a:t>Inicio 5:10 pm</a:t>
-            </a:r>
-          </a:p>
-        </p:txBody>
-      </p:sp>
-      <p:sp>
-        <p:nvSpPr>
-          <p:cNvPr id="6" name="TextBox 5"/>
-          <p:cNvSpPr txBox="1"/>
-          <p:nvPr/>
-        </p:nvSpPr>
-        <p:spPr>
-          <a:xfrm>
             <a:off x="11094415" y="6446520"/>
             <a:ext cx="548640" cy="274320"/>
           </a:xfrm>
@@ -7435,41 +7120,6 @@
         </p:nvSpPr>
         <p:spPr>
           <a:xfrm>
-            <a:off x="2194560" y="6446520"/>
-            <a:ext cx="5943600" cy="274320"/>
-          </a:xfrm>
-          <a:prstGeom prst="rect">
-            <a:avLst/>
-          </a:prstGeom>
-          <a:noFill/>
-        </p:spPr>
-        <p:txBody>
-          <a:bodyPr wrap="square" anchor="t" lIns="0" rIns="0" tIns="0" bIns="0">
-            <a:spAutoFit/>
-          </a:bodyPr>
-          <a:lstStyle/>
-          <a:p>
-            <a:pPr algn="l"/>
-            <a:r>
-              <a:rPr sz="1000" b="1" i="0">
-                <a:solidFill>
-                  <a:srgbClr val="8F989D"/>
-                </a:solidFill>
-                <a:latin typeface="Calibri"/>
-              </a:rPr>
-              <a:t>Inicio 5:10 pm</a:t>
-            </a:r>
-          </a:p>
-        </p:txBody>
-      </p:sp>
-      <p:sp>
-        <p:nvSpPr>
-          <p:cNvPr id="6" name="TextBox 5"/>
-          <p:cNvSpPr txBox="1"/>
-          <p:nvPr/>
-        </p:nvSpPr>
-        <p:spPr>
-          <a:xfrm>
             <a:off x="11094415" y="6446520"/>
             <a:ext cx="548640" cy="274320"/>
           </a:xfrm>
@@ -7716,41 +7366,6 @@
           </a:p>
         </p:txBody>
       </p:sp>
-      <p:sp>
-        <p:nvSpPr>
-          <p:cNvPr id="7" name="TextBox 6"/>
-          <p:cNvSpPr txBox="1"/>
-          <p:nvPr/>
-        </p:nvSpPr>
-        <p:spPr>
-          <a:xfrm>
-            <a:off x="2194560" y="6446520"/>
-            <a:ext cx="5943600" cy="274320"/>
-          </a:xfrm>
-          <a:prstGeom prst="rect">
-            <a:avLst/>
-          </a:prstGeom>
-          <a:noFill/>
-        </p:spPr>
-        <p:txBody>
-          <a:bodyPr wrap="square" anchor="t" lIns="0" rIns="0" tIns="0" bIns="0">
-            <a:spAutoFit/>
-          </a:bodyPr>
-          <a:lstStyle/>
-          <a:p>
-            <a:pPr algn="l"/>
-            <a:r>
-              <a:rPr sz="1000" b="1" i="0">
-                <a:solidFill>
-                  <a:srgbClr val="8F989D"/>
-                </a:solidFill>
-                <a:latin typeface="Calibri"/>
-              </a:rPr>
-              <a:t>Inicio 5:10 pm</a:t>
-            </a:r>
-          </a:p>
-        </p:txBody>
-      </p:sp>
     </p:spTree>
   </p:cSld>
   <p:clrMapOvr>
@@ -8123,41 +7738,6 @@
         </p:nvSpPr>
         <p:spPr>
           <a:xfrm>
-            <a:off x="2194560" y="6446520"/>
-            <a:ext cx="5943600" cy="274320"/>
-          </a:xfrm>
-          <a:prstGeom prst="rect">
-            <a:avLst/>
-          </a:prstGeom>
-          <a:noFill/>
-        </p:spPr>
-        <p:txBody>
-          <a:bodyPr wrap="square" anchor="t" lIns="0" rIns="0" tIns="0" bIns="0">
-            <a:spAutoFit/>
-          </a:bodyPr>
-          <a:lstStyle/>
-          <a:p>
-            <a:pPr algn="l"/>
-            <a:r>
-              <a:rPr sz="1000" b="1" i="0">
-                <a:solidFill>
-                  <a:srgbClr val="8F989D"/>
-                </a:solidFill>
-                <a:latin typeface="Calibri"/>
-              </a:rPr>
-              <a:t>Inicio 5:10 pm</a:t>
-            </a:r>
-          </a:p>
-        </p:txBody>
-      </p:sp>
-      <p:sp>
-        <p:nvSpPr>
-          <p:cNvPr id="6" name="TextBox 5"/>
-          <p:cNvSpPr txBox="1"/>
-          <p:nvPr/>
-        </p:nvSpPr>
-        <p:spPr>
-          <a:xfrm>
             <a:off x="11094415" y="6446520"/>
             <a:ext cx="548640" cy="274320"/>
           </a:xfrm>
@@ -8187,7 +7767,7 @@
       </p:sp>
       <p:sp>
         <p:nvSpPr>
-          <p:cNvPr id="7" name="TextBox 6"/>
+          <p:cNvPr id="6" name="TextBox 5"/>
           <p:cNvSpPr txBox="1"/>
           <p:nvPr/>
         </p:nvSpPr>
@@ -8620,41 +8200,6 @@
       <p:sp>
         <p:nvSpPr>
           <p:cNvPr id="5" name="TextBox 4"/>
-          <p:cNvSpPr txBox="1"/>
-          <p:nvPr/>
-        </p:nvSpPr>
-        <p:spPr>
-          <a:xfrm>
-            <a:off x="2194560" y="6446520"/>
-            <a:ext cx="5943600" cy="274320"/>
-          </a:xfrm>
-          <a:prstGeom prst="rect">
-            <a:avLst/>
-          </a:prstGeom>
-          <a:noFill/>
-        </p:spPr>
-        <p:txBody>
-          <a:bodyPr wrap="square" anchor="t" lIns="0" rIns="0" tIns="0" bIns="0">
-            <a:spAutoFit/>
-          </a:bodyPr>
-          <a:lstStyle/>
-          <a:p>
-            <a:pPr algn="l"/>
-            <a:r>
-              <a:rPr sz="1000" b="1" i="0">
-                <a:solidFill>
-                  <a:srgbClr val="8F989D"/>
-                </a:solidFill>
-                <a:latin typeface="Calibri"/>
-              </a:rPr>
-              <a:t>Inicio 5:10 pm</a:t>
-            </a:r>
-          </a:p>
-        </p:txBody>
-      </p:sp>
-      <p:sp>
-        <p:nvSpPr>
-          <p:cNvPr id="6" name="TextBox 5"/>
           <p:cNvSpPr txBox="1"/>
           <p:nvPr/>
         </p:nvSpPr>
@@ -9565,41 +9110,6 @@
         </p:nvSpPr>
         <p:spPr>
           <a:xfrm>
-            <a:off x="2194560" y="6446520"/>
-            <a:ext cx="5943600" cy="274320"/>
-          </a:xfrm>
-          <a:prstGeom prst="rect">
-            <a:avLst/>
-          </a:prstGeom>
-          <a:noFill/>
-        </p:spPr>
-        <p:txBody>
-          <a:bodyPr wrap="square" anchor="t" lIns="0" rIns="0" tIns="0" bIns="0">
-            <a:spAutoFit/>
-          </a:bodyPr>
-          <a:lstStyle/>
-          <a:p>
-            <a:pPr algn="l"/>
-            <a:r>
-              <a:rPr sz="1000" b="1" i="0">
-                <a:solidFill>
-                  <a:srgbClr val="8F989D"/>
-                </a:solidFill>
-                <a:latin typeface="Calibri"/>
-              </a:rPr>
-              <a:t>Inicio 5:10 pm</a:t>
-            </a:r>
-          </a:p>
-        </p:txBody>
-      </p:sp>
-      <p:sp>
-        <p:nvSpPr>
-          <p:cNvPr id="7" name="TextBox 6"/>
-          <p:cNvSpPr txBox="1"/>
-          <p:nvPr/>
-        </p:nvSpPr>
-        <p:spPr>
-          <a:xfrm>
             <a:off x="11094415" y="6446520"/>
             <a:ext cx="548640" cy="274320"/>
           </a:xfrm>
@@ -9967,41 +9477,6 @@
         </p:nvSpPr>
         <p:spPr>
           <a:xfrm>
-            <a:off x="2194560" y="6446520"/>
-            <a:ext cx="5943600" cy="274320"/>
-          </a:xfrm>
-          <a:prstGeom prst="rect">
-            <a:avLst/>
-          </a:prstGeom>
-          <a:noFill/>
-        </p:spPr>
-        <p:txBody>
-          <a:bodyPr wrap="square" anchor="t" lIns="0" rIns="0" tIns="0" bIns="0">
-            <a:spAutoFit/>
-          </a:bodyPr>
-          <a:lstStyle/>
-          <a:p>
-            <a:pPr algn="l"/>
-            <a:r>
-              <a:rPr sz="1000" b="1" i="0">
-                <a:solidFill>
-                  <a:srgbClr val="8F989D"/>
-                </a:solidFill>
-                <a:latin typeface="Calibri"/>
-              </a:rPr>
-              <a:t>Inicio 5:10 pm</a:t>
-            </a:r>
-          </a:p>
-        </p:txBody>
-      </p:sp>
-      <p:sp>
-        <p:nvSpPr>
-          <p:cNvPr id="6" name="TextBox 5"/>
-          <p:cNvSpPr txBox="1"/>
-          <p:nvPr/>
-        </p:nvSpPr>
-        <p:spPr>
-          <a:xfrm>
             <a:off x="11094415" y="6446520"/>
             <a:ext cx="548640" cy="274320"/>
           </a:xfrm>
@@ -10278,41 +9753,6 @@
       <p:sp>
         <p:nvSpPr>
           <p:cNvPr id="5" name="TextBox 4"/>
-          <p:cNvSpPr txBox="1"/>
-          <p:nvPr/>
-        </p:nvSpPr>
-        <p:spPr>
-          <a:xfrm>
-            <a:off x="2194560" y="6446520"/>
-            <a:ext cx="5943600" cy="274320"/>
-          </a:xfrm>
-          <a:prstGeom prst="rect">
-            <a:avLst/>
-          </a:prstGeom>
-          <a:noFill/>
-        </p:spPr>
-        <p:txBody>
-          <a:bodyPr wrap="square" anchor="t" lIns="0" rIns="0" tIns="0" bIns="0">
-            <a:spAutoFit/>
-          </a:bodyPr>
-          <a:lstStyle/>
-          <a:p>
-            <a:pPr algn="l"/>
-            <a:r>
-              <a:rPr sz="1000" b="1" i="0">
-                <a:solidFill>
-                  <a:srgbClr val="8F989D"/>
-                </a:solidFill>
-                <a:latin typeface="Calibri"/>
-              </a:rPr>
-              <a:t>Inicio 5:10 pm</a:t>
-            </a:r>
-          </a:p>
-        </p:txBody>
-      </p:sp>
-      <p:sp>
-        <p:nvSpPr>
-          <p:cNvPr id="6" name="TextBox 5"/>
           <p:cNvSpPr txBox="1"/>
           <p:nvPr/>
         </p:nvSpPr>
@@ -10821,41 +10261,6 @@
         </p:nvSpPr>
         <p:spPr>
           <a:xfrm>
-            <a:off x="2194560" y="6446520"/>
-            <a:ext cx="5943600" cy="274320"/>
-          </a:xfrm>
-          <a:prstGeom prst="rect">
-            <a:avLst/>
-          </a:prstGeom>
-          <a:noFill/>
-        </p:spPr>
-        <p:txBody>
-          <a:bodyPr wrap="square" anchor="t" lIns="0" rIns="0" tIns="0" bIns="0">
-            <a:spAutoFit/>
-          </a:bodyPr>
-          <a:lstStyle/>
-          <a:p>
-            <a:pPr algn="l"/>
-            <a:r>
-              <a:rPr sz="1000" b="1" i="0">
-                <a:solidFill>
-                  <a:srgbClr val="8F989D"/>
-                </a:solidFill>
-                <a:latin typeface="Calibri"/>
-              </a:rPr>
-              <a:t>Inicio 5:10 pm</a:t>
-            </a:r>
-          </a:p>
-        </p:txBody>
-      </p:sp>
-      <p:sp>
-        <p:nvSpPr>
-          <p:cNvPr id="7" name="TextBox 6"/>
-          <p:cNvSpPr txBox="1"/>
-          <p:nvPr/>
-        </p:nvSpPr>
-        <p:spPr>
-          <a:xfrm>
             <a:off x="11094415" y="6446520"/>
             <a:ext cx="548640" cy="274320"/>
           </a:xfrm>
@@ -11198,41 +10603,6 @@
       <p:sp>
         <p:nvSpPr>
           <p:cNvPr id="5" name="TextBox 4"/>
-          <p:cNvSpPr txBox="1"/>
-          <p:nvPr/>
-        </p:nvSpPr>
-        <p:spPr>
-          <a:xfrm>
-            <a:off x="2194560" y="6446520"/>
-            <a:ext cx="5943600" cy="274320"/>
-          </a:xfrm>
-          <a:prstGeom prst="rect">
-            <a:avLst/>
-          </a:prstGeom>
-          <a:noFill/>
-        </p:spPr>
-        <p:txBody>
-          <a:bodyPr wrap="square" anchor="t" lIns="0" rIns="0" tIns="0" bIns="0">
-            <a:spAutoFit/>
-          </a:bodyPr>
-          <a:lstStyle/>
-          <a:p>
-            <a:pPr algn="l"/>
-            <a:r>
-              <a:rPr sz="1000" b="1" i="0">
-                <a:solidFill>
-                  <a:srgbClr val="8F989D"/>
-                </a:solidFill>
-                <a:latin typeface="Calibri"/>
-              </a:rPr>
-              <a:t>Inicio 5:10 pm</a:t>
-            </a:r>
-          </a:p>
-        </p:txBody>
-      </p:sp>
-      <p:sp>
-        <p:nvSpPr>
-          <p:cNvPr id="6" name="TextBox 5"/>
           <p:cNvSpPr txBox="1"/>
           <p:nvPr/>
         </p:nvSpPr>
@@ -11901,41 +11271,6 @@
         </p:nvSpPr>
         <p:spPr>
           <a:xfrm>
-            <a:off x="2194560" y="6446520"/>
-            <a:ext cx="5943600" cy="274320"/>
-          </a:xfrm>
-          <a:prstGeom prst="rect">
-            <a:avLst/>
-          </a:prstGeom>
-          <a:noFill/>
-        </p:spPr>
-        <p:txBody>
-          <a:bodyPr wrap="square" anchor="t" lIns="0" rIns="0" tIns="0" bIns="0">
-            <a:spAutoFit/>
-          </a:bodyPr>
-          <a:lstStyle/>
-          <a:p>
-            <a:pPr algn="l"/>
-            <a:r>
-              <a:rPr sz="1000" b="1" i="0">
-                <a:solidFill>
-                  <a:srgbClr val="8F989D"/>
-                </a:solidFill>
-                <a:latin typeface="Calibri"/>
-              </a:rPr>
-              <a:t>Inicio 5:10 pm</a:t>
-            </a:r>
-          </a:p>
-        </p:txBody>
-      </p:sp>
-      <p:sp>
-        <p:nvSpPr>
-          <p:cNvPr id="7" name="TextBox 6"/>
-          <p:cNvSpPr txBox="1"/>
-          <p:nvPr/>
-        </p:nvSpPr>
-        <p:spPr>
-          <a:xfrm>
             <a:off x="11094415" y="6446520"/>
             <a:ext cx="548640" cy="274320"/>
           </a:xfrm>

--- a/Pregrado/Investigacion en ciencia y tecnologia/Clases/Sesion 02 - MinCiencias · 6 líneas de Ingeniería · elección de línea/Presentacion.pptx
+++ b/Pregrado/Investigacion en ciencia y tecnologia/Clases/Sesion 02 - MinCiencias · 6 líneas de Ingeniería · elección de línea/Presentacion.pptx
@@ -24,6 +24,8 @@
     <p:sldId id="272" r:id="rId23"/>
     <p:sldId id="273" r:id="rId24"/>
     <p:sldId id="274" r:id="rId25"/>
+    <p:sldId id="275" r:id="rId26"/>
+    <p:sldId id="276" r:id="rId27"/>
   </p:sldIdLst>
   <p:sldSz cx="12191695" cy="6858000" type="screen4x3"/>
   <p:notesSz cx="6858000" cy="9144000"/>
@@ -5872,7 +5874,7 @@
                 </a:solidFill>
                 <a:latin typeface="Calibri"/>
               </a:rPr>
-              <a:t>TALLER · Línea elegida + justificación (~20 min)</a:t>
+              <a:t>TALLER · Línea elegida + justificación</a:t>
             </a:r>
           </a:p>
         </p:txBody>
@@ -5885,8 +5887,8 @@
         </p:nvSpPr>
         <p:spPr>
           <a:xfrm>
-            <a:off x="640080" y="1691639"/>
-            <a:ext cx="10911535" cy="4617720"/>
+            <a:off x="640080" y="1280160"/>
+            <a:ext cx="10911535" cy="411480"/>
           </a:xfrm>
           <a:prstGeom prst="rect">
             <a:avLst/>
@@ -5899,6 +5901,41 @@
           </a:bodyPr>
           <a:lstStyle/>
           <a:p>
+            <a:pPr algn="ctr"/>
+            <a:r>
+              <a:rPr sz="1500" b="0" i="0">
+                <a:solidFill>
+                  <a:srgbClr val="2B2B2B"/>
+                </a:solidFill>
+                <a:latin typeface="Calibri"/>
+              </a:rPr>
+              <a:t>Individual · el Docente pasa acompañando · Google Docs + Google Académico, nada que instalar</a:t>
+            </a:r>
+          </a:p>
+        </p:txBody>
+      </p:sp>
+      <p:sp>
+        <p:nvSpPr>
+          <p:cNvPr id="5" name="TextBox 4"/>
+          <p:cNvSpPr txBox="1"/>
+          <p:nvPr/>
+        </p:nvSpPr>
+        <p:spPr>
+          <a:xfrm>
+            <a:off x="640080" y="2011679"/>
+            <a:ext cx="10911535" cy="4297680"/>
+          </a:xfrm>
+          <a:prstGeom prst="rect">
+            <a:avLst/>
+          </a:prstGeom>
+          <a:noFill/>
+        </p:spPr>
+        <p:txBody>
+          <a:bodyPr wrap="square" anchor="t" lIns="0" rIns="0" tIns="0" bIns="0">
+            <a:spAutoFit/>
+          </a:bodyPr>
+          <a:lstStyle/>
+          <a:p>
             <a:pPr>
               <a:spcAft>
                 <a:spcPts val="1000"/>
@@ -5920,7 +5957,7 @@
                 </a:solidFill>
                 <a:latin typeface="Calibri"/>
               </a:rPr>
-              <a:t>Consigna literal.</a:t>
+              <a:t>Al final tiene:</a:t>
             </a:r>
             <a:r>
               <a:rPr sz="1600" b="0" i="0">
@@ -5929,215 +5966,7 @@
                 </a:solidFill>
                 <a:latin typeface="Calibri"/>
               </a:rPr>
-              <a:t> En su documento `S02_LineaInvestigacion_Apellido` escriba:</a:t>
-            </a:r>
-          </a:p>
-          <a:p>
-            <a:pPr lvl="1">
-              <a:spcAft>
-                <a:spcPts val="600"/>
-              </a:spcAft>
-            </a:pPr>
-            <a:r>
-              <a:rPr sz="1500" b="0" i="0">
-                <a:solidFill>
-                  <a:srgbClr val="2B2B2B"/>
-                </a:solidFill>
-                <a:latin typeface="Calibri"/>
-              </a:rPr>
-              <a:t>●   </a:t>
-            </a:r>
-            <a:r>
-              <a:rPr sz="1500" b="1" i="0">
-                <a:solidFill>
-                  <a:srgbClr val="2B2B2B"/>
-                </a:solidFill>
-                <a:latin typeface="Calibri"/>
-              </a:rPr>
-              <a:t>(1)</a:t>
-            </a:r>
-            <a:r>
-              <a:rPr sz="1500" b="0" i="0">
-                <a:solidFill>
-                  <a:srgbClr val="2B2B2B"/>
-                </a:solidFill>
-                <a:latin typeface="Calibri"/>
-              </a:rPr>
-              <a:t> La </a:t>
-            </a:r>
-            <a:r>
-              <a:rPr sz="1500" b="1" i="0">
-                <a:solidFill>
-                  <a:srgbClr val="2B2B2B"/>
-                </a:solidFill>
-                <a:latin typeface="Calibri"/>
-              </a:rPr>
-              <a:t>línea elegida</a:t>
-            </a:r>
-            <a:r>
-              <a:rPr sz="1500" b="0" i="0">
-                <a:solidFill>
-                  <a:srgbClr val="2B2B2B"/>
-                </a:solidFill>
-                <a:latin typeface="Calibri"/>
-              </a:rPr>
-              <a:t>, con su nombre exacto de las seis del programa.</a:t>
-            </a:r>
-          </a:p>
-          <a:p>
-            <a:pPr lvl="1">
-              <a:spcAft>
-                <a:spcPts val="600"/>
-              </a:spcAft>
-            </a:pPr>
-            <a:r>
-              <a:rPr sz="1500" b="0" i="0">
-                <a:solidFill>
-                  <a:srgbClr val="2B2B2B"/>
-                </a:solidFill>
-                <a:latin typeface="Calibri"/>
-              </a:rPr>
-              <a:t>●   </a:t>
-            </a:r>
-            <a:r>
-              <a:rPr sz="1500" b="1" i="0">
-                <a:solidFill>
-                  <a:srgbClr val="2B2B2B"/>
-                </a:solidFill>
-                <a:latin typeface="Calibri"/>
-              </a:rPr>
-              <a:t>(2)</a:t>
-            </a:r>
-            <a:r>
-              <a:rPr sz="1500" b="0" i="0">
-                <a:solidFill>
-                  <a:srgbClr val="2B2B2B"/>
-                </a:solidFill>
-                <a:latin typeface="Calibri"/>
-              </a:rPr>
-              <a:t> Un </a:t>
-            </a:r>
-            <a:r>
-              <a:rPr sz="1500" b="1" i="0">
-                <a:solidFill>
-                  <a:srgbClr val="2B2B2B"/>
-                </a:solidFill>
-                <a:latin typeface="Calibri"/>
-              </a:rPr>
-              <a:t>párrafo de justificación</a:t>
-            </a:r>
-            <a:r>
-              <a:rPr sz="1500" b="0" i="0">
-                <a:solidFill>
-                  <a:srgbClr val="2B2B2B"/>
-                </a:solidFill>
-                <a:latin typeface="Calibri"/>
-              </a:rPr>
-              <a:t> con los tres movimientos: afinidad, fuentes y pertinencia local, más la línea descartada.</a:t>
-            </a:r>
-          </a:p>
-          <a:p>
-            <a:pPr lvl="1">
-              <a:spcAft>
-                <a:spcPts val="600"/>
-              </a:spcAft>
-            </a:pPr>
-            <a:r>
-              <a:rPr sz="1500" b="0" i="0">
-                <a:solidFill>
-                  <a:srgbClr val="2B2B2B"/>
-                </a:solidFill>
-                <a:latin typeface="Calibri"/>
-              </a:rPr>
-              <a:t>●   </a:t>
-            </a:r>
-            <a:r>
-              <a:rPr sz="1500" b="1" i="0">
-                <a:solidFill>
-                  <a:srgbClr val="2B2B2B"/>
-                </a:solidFill>
-                <a:latin typeface="Calibri"/>
-              </a:rPr>
-              <a:t>(3)</a:t>
-            </a:r>
-            <a:r>
-              <a:rPr sz="1500" b="0" i="0">
-                <a:solidFill>
-                  <a:srgbClr val="2B2B2B"/>
-                </a:solidFill>
-                <a:latin typeface="Calibri"/>
-              </a:rPr>
-              <a:t> </a:t>
-            </a:r>
-            <a:r>
-              <a:rPr sz="1500" b="1" i="0">
-                <a:solidFill>
-                  <a:srgbClr val="2B2B2B"/>
-                </a:solidFill>
-                <a:latin typeface="Calibri"/>
-              </a:rPr>
-              <a:t>Dos referentes exploratorios</a:t>
-            </a:r>
-            <a:r>
-              <a:rPr sz="1500" b="0" i="0">
-                <a:solidFill>
-                  <a:srgbClr val="2B2B2B"/>
-                </a:solidFill>
-                <a:latin typeface="Calibri"/>
-              </a:rPr>
-              <a:t> encontrados en Google Académico, en APA tentativa (autor, año, título, fuente).</a:t>
-            </a:r>
-          </a:p>
-          <a:p>
-            <a:pPr lvl="1">
-              <a:spcAft>
-                <a:spcPts val="600"/>
-              </a:spcAft>
-            </a:pPr>
-            <a:r>
-              <a:rPr sz="1500" b="0" i="0">
-                <a:solidFill>
-                  <a:srgbClr val="2B2B2B"/>
-                </a:solidFill>
-                <a:latin typeface="Calibri"/>
-              </a:rPr>
-              <a:t>●   </a:t>
-            </a:r>
-            <a:r>
-              <a:rPr sz="1500" b="1" i="0">
-                <a:solidFill>
-                  <a:srgbClr val="2B2B2B"/>
-                </a:solidFill>
-                <a:latin typeface="Calibri"/>
-              </a:rPr>
-              <a:t>(4)</a:t>
-            </a:r>
-            <a:r>
-              <a:rPr sz="1500" b="0" i="0">
-                <a:solidFill>
-                  <a:srgbClr val="2B2B2B"/>
-                </a:solidFill>
-                <a:latin typeface="Calibri"/>
-              </a:rPr>
-              <a:t> La </a:t>
-            </a:r>
-            <a:r>
-              <a:rPr sz="1500" b="1" i="0">
-                <a:solidFill>
-                  <a:srgbClr val="2B2B2B"/>
-                </a:solidFill>
-                <a:latin typeface="Calibri"/>
-              </a:rPr>
-              <a:t>tabla de decisión</a:t>
-            </a:r>
-            <a:r>
-              <a:rPr sz="1500" b="0" i="0">
-                <a:solidFill>
-                  <a:srgbClr val="2B2B2B"/>
-                </a:solidFill>
-                <a:latin typeface="Calibri"/>
-              </a:rPr>
-              <a:t> con las dos líneas candidatas comparadas.</a:t>
+              <a:t> su línea elegida, el párrafo que la justifica, dos referentes y la tabla de decisión.</a:t>
             </a:r>
           </a:p>
           <a:p>
@@ -6162,7 +5991,7 @@
                 </a:solidFill>
                 <a:latin typeface="Calibri"/>
               </a:rPr>
-              <a:t>Tiempo:</a:t>
+              <a:t>Paso 1</a:t>
             </a:r>
             <a:r>
               <a:rPr sz="1600" b="0" i="0">
@@ -6171,7 +6000,43 @@
                 </a:solidFill>
                 <a:latin typeface="Calibri"/>
               </a:rPr>
-              <a:t> ~20 minutos de trabajo individual; el Docente pasa acompañando.</a:t>
+              <a:t> · Escriba la </a:t>
+            </a:r>
+            <a:r>
+              <a:rPr sz="1600" b="1" i="0">
+                <a:solidFill>
+                  <a:srgbClr val="2B2B2B"/>
+                </a:solidFill>
+                <a:latin typeface="Calibri"/>
+              </a:rPr>
+              <a:t>línea elegida</a:t>
+            </a:r>
+            <a:r>
+              <a:rPr sz="1600" b="0" i="0">
+                <a:solidFill>
+                  <a:srgbClr val="2B2B2B"/>
+                </a:solidFill>
+                <a:latin typeface="Calibri"/>
+              </a:rPr>
+              <a:t> con su </a:t>
+            </a:r>
+            <a:r>
+              <a:rPr sz="1600" b="1" i="0">
+                <a:solidFill>
+                  <a:srgbClr val="2B2B2B"/>
+                </a:solidFill>
+                <a:latin typeface="Calibri"/>
+              </a:rPr>
+              <a:t>nombre exacto</a:t>
+            </a:r>
+            <a:r>
+              <a:rPr sz="1600" b="0" i="0">
+                <a:solidFill>
+                  <a:srgbClr val="2B2B2B"/>
+                </a:solidFill>
+                <a:latin typeface="Calibri"/>
+              </a:rPr>
+              <a:t> de las seis del programa.</a:t>
             </a:r>
           </a:p>
           <a:p>
@@ -6196,7 +6061,7 @@
                 </a:solidFill>
                 <a:latin typeface="Calibri"/>
               </a:rPr>
-              <a:t>Criterio de éxito (verificable):</a:t>
+              <a:t>Paso 2</a:t>
             </a:r>
             <a:r>
               <a:rPr sz="1600" b="0" i="0">
@@ -6205,7 +6070,7 @@
                 </a:solidFill>
                 <a:latin typeface="Calibri"/>
               </a:rPr>
-              <a:t> al leer solo su párrafo, sin conocer su tema, se entiende </a:t>
+              <a:t> · Escriba un </a:t>
             </a:r>
             <a:r>
               <a:rPr sz="1600" b="1" i="0">
@@ -6214,7 +6079,7 @@
                 </a:solidFill>
                 <a:latin typeface="Calibri"/>
               </a:rPr>
-              <a:t>por qué esa línea y no la otra</a:t>
+              <a:t>párrafo de justificación</a:t>
             </a:r>
             <a:r>
               <a:rPr sz="1600" b="0" i="0">
@@ -6223,7 +6088,25 @@
                 </a:solidFill>
                 <a:latin typeface="Calibri"/>
               </a:rPr>
-              <a:t>, y los dos referentes demuestran que ya existe literatura para trabajarla.</a:t>
+              <a:t> con los tres movimientos —afinidad, fuentes y pertinencia local— y nombre también </a:t>
+            </a:r>
+            <a:r>
+              <a:rPr sz="1600" b="1" i="0">
+                <a:solidFill>
+                  <a:srgbClr val="2B2B2B"/>
+                </a:solidFill>
+                <a:latin typeface="Calibri"/>
+              </a:rPr>
+              <a:t>la línea que descartó</a:t>
+            </a:r>
+            <a:r>
+              <a:rPr sz="1600" b="0" i="0">
+                <a:solidFill>
+                  <a:srgbClr val="2B2B2B"/>
+                </a:solidFill>
+                <a:latin typeface="Calibri"/>
+              </a:rPr>
+              <a:t>.</a:t>
             </a:r>
           </a:p>
           <a:p>
@@ -6239,7 +6122,7 @@
                 </a:solidFill>
                 <a:latin typeface="Calibri"/>
               </a:rPr>
-              <a:t>–   Si sus dos referentes no aparecen, la justificación </a:t>
+              <a:t>–   </a:t>
             </a:r>
             <a:r>
               <a:rPr sz="1600" b="1" i="0">
@@ -6248,7 +6131,7 @@
                 </a:solidFill>
                 <a:latin typeface="Calibri"/>
               </a:rPr>
-              <a:t>no está terminada</a:t>
+              <a:t>Paso 3</a:t>
             </a:r>
             <a:r>
               <a:rPr sz="1600" b="0" i="0">
@@ -6257,14 +6140,136 @@
                 </a:solidFill>
                 <a:latin typeface="Calibri"/>
               </a:rPr>
-              <a:t>: el criterio de fuentes no se cumplió.</a:t>
-            </a:r>
-          </a:p>
-        </p:txBody>
-      </p:sp>
-      <p:sp>
-        <p:nvSpPr>
-          <p:cNvPr id="5" name="TextBox 4"/>
+              <a:t> · Busque en Google Académico </a:t>
+            </a:r>
+            <a:r>
+              <a:rPr sz="1600" b="1" i="0">
+                <a:solidFill>
+                  <a:srgbClr val="2B2B2B"/>
+                </a:solidFill>
+                <a:latin typeface="Calibri"/>
+              </a:rPr>
+              <a:t>dos referentes exploratorios</a:t>
+            </a:r>
+            <a:r>
+              <a:rPr sz="1600" b="0" i="0">
+                <a:solidFill>
+                  <a:srgbClr val="2B2B2B"/>
+                </a:solidFill>
+                <a:latin typeface="Calibri"/>
+              </a:rPr>
+              <a:t> y páselos a APA tentativa: autor, año, título, fuente.</a:t>
+            </a:r>
+          </a:p>
+          <a:p>
+            <a:pPr>
+              <a:spcAft>
+                <a:spcPts val="1000"/>
+              </a:spcAft>
+            </a:pPr>
+            <a:r>
+              <a:rPr sz="1600" b="0" i="0">
+                <a:solidFill>
+                  <a:srgbClr val="2B2B2B"/>
+                </a:solidFill>
+                <a:latin typeface="Calibri"/>
+              </a:rPr>
+              <a:t>–   </a:t>
+            </a:r>
+            <a:r>
+              <a:rPr sz="1600" b="1" i="0">
+                <a:solidFill>
+                  <a:srgbClr val="2B2B2B"/>
+                </a:solidFill>
+                <a:latin typeface="Calibri"/>
+              </a:rPr>
+              <a:t>Paso 4</a:t>
+            </a:r>
+            <a:r>
+              <a:rPr sz="1600" b="0" i="0">
+                <a:solidFill>
+                  <a:srgbClr val="2B2B2B"/>
+                </a:solidFill>
+                <a:latin typeface="Calibri"/>
+              </a:rPr>
+              <a:t> · Llene la </a:t>
+            </a:r>
+            <a:r>
+              <a:rPr sz="1600" b="1" i="0">
+                <a:solidFill>
+                  <a:srgbClr val="2B2B2B"/>
+                </a:solidFill>
+                <a:latin typeface="Calibri"/>
+              </a:rPr>
+              <a:t>tabla de decisión</a:t>
+            </a:r>
+            <a:r>
+              <a:rPr sz="1600" b="0" i="0">
+                <a:solidFill>
+                  <a:srgbClr val="2B2B2B"/>
+                </a:solidFill>
+                <a:latin typeface="Calibri"/>
+              </a:rPr>
+              <a:t> comparando las dos líneas candidatas.</a:t>
+            </a:r>
+          </a:p>
+          <a:p>
+            <a:pPr>
+              <a:spcAft>
+                <a:spcPts val="1000"/>
+              </a:spcAft>
+            </a:pPr>
+            <a:r>
+              <a:rPr sz="1600" b="0" i="0">
+                <a:solidFill>
+                  <a:srgbClr val="2B2B2B"/>
+                </a:solidFill>
+                <a:latin typeface="Calibri"/>
+              </a:rPr>
+              <a:t>–   </a:t>
+            </a:r>
+            <a:r>
+              <a:rPr sz="1600" b="1" i="0">
+                <a:solidFill>
+                  <a:srgbClr val="2B2B2B"/>
+                </a:solidFill>
+                <a:latin typeface="Calibri"/>
+              </a:rPr>
+              <a:t>En clase, sin falta:</a:t>
+            </a:r>
+            <a:r>
+              <a:rPr sz="1600" b="0" i="0">
+                <a:solidFill>
+                  <a:srgbClr val="2B2B2B"/>
+                </a:solidFill>
+                <a:latin typeface="Calibri"/>
+              </a:rPr>
+              <a:t> los </a:t>
+            </a:r>
+            <a:r>
+              <a:rPr sz="1600" b="1" i="0">
+                <a:solidFill>
+                  <a:srgbClr val="2B2B2B"/>
+                </a:solidFill>
+                <a:latin typeface="Calibri"/>
+              </a:rPr>
+              <a:t>pasos 1 a 2</a:t>
+            </a:r>
+            <a:r>
+              <a:rPr sz="1600" b="0" i="0">
+                <a:solidFill>
+                  <a:srgbClr val="2B2B2B"/>
+                </a:solidFill>
+                <a:latin typeface="Calibri"/>
+              </a:rPr>
+              <a:t>. Del 3 en adelante puede quedar en trabajo autónomo, pero antes de la próxima sesión.</a:t>
+            </a:r>
+          </a:p>
+        </p:txBody>
+      </p:sp>
+      <p:sp>
+        <p:nvSpPr>
+          <p:cNvPr id="6" name="TextBox 5"/>
           <p:cNvSpPr txBox="1"/>
           <p:nvPr/>
         </p:nvSpPr>
@@ -6293,40 +6298,6 @@
                 <a:latin typeface="Calibri"/>
               </a:rPr>
               <a:t>16</a:t>
-            </a:r>
-          </a:p>
-        </p:txBody>
-      </p:sp>
-      <p:sp>
-        <p:nvSpPr>
-          <p:cNvPr id="6" name="TextBox 5"/>
-          <p:cNvSpPr txBox="1"/>
-          <p:nvPr/>
-        </p:nvSpPr>
-        <p:spPr>
-          <a:xfrm>
-            <a:off x="640080" y="5943600"/>
-            <a:ext cx="9997135" cy="457200"/>
-          </a:xfrm>
-          <a:prstGeom prst="rect">
-            <a:avLst/>
-          </a:prstGeom>
-          <a:noFill/>
-        </p:spPr>
-        <p:txBody>
-          <a:bodyPr wrap="square" anchor="t" lIns="0" rIns="0" tIns="0" bIns="0">
-            <a:spAutoFit/>
-          </a:bodyPr>
-          <a:lstStyle/>
-          <a:p>
-            <a:r>
-              <a:rPr sz="1200" b="0" i="1">
-                <a:solidFill>
-                  <a:srgbClr val="2B2B2B"/>
-                </a:solidFill>
-                <a:latin typeface="Calibri"/>
-              </a:rPr>
-              <a:t>Herramientas: Google Docs + Google Académico. Todo gratis y en el navegador; no se instala nada.</a:t>
             </a:r>
           </a:p>
         </p:txBody>
@@ -6431,7 +6402,7 @@
                 </a:solidFill>
                 <a:latin typeface="Calibri"/>
               </a:rPr>
-              <a:t>Checklist antes de subir su entrega</a:t>
+              <a:t>TALLER · cómo se revisa y dónde se entrega</a:t>
             </a:r>
           </a:p>
         </p:txBody>
@@ -6444,8 +6415,8 @@
         </p:nvSpPr>
         <p:spPr>
           <a:xfrm>
-            <a:off x="640080" y="1691639"/>
-            <a:ext cx="10911535" cy="4617720"/>
+            <a:off x="640080" y="1280160"/>
+            <a:ext cx="10911535" cy="411480"/>
           </a:xfrm>
           <a:prstGeom prst="rect">
             <a:avLst/>
@@ -6458,6 +6429,41 @@
           </a:bodyPr>
           <a:lstStyle/>
           <a:p>
+            <a:pPr algn="ctr"/>
+            <a:r>
+              <a:rPr sz="1500" b="0" i="0">
+                <a:solidFill>
+                  <a:srgbClr val="2B2B2B"/>
+                </a:solidFill>
+                <a:latin typeface="Calibri"/>
+              </a:rPr>
+              <a:t>Línea elegida + justificación</a:t>
+            </a:r>
+          </a:p>
+        </p:txBody>
+      </p:sp>
+      <p:sp>
+        <p:nvSpPr>
+          <p:cNvPr id="5" name="TextBox 4"/>
+          <p:cNvSpPr txBox="1"/>
+          <p:nvPr/>
+        </p:nvSpPr>
+        <p:spPr>
+          <a:xfrm>
+            <a:off x="640080" y="2011679"/>
+            <a:ext cx="10911535" cy="4297680"/>
+          </a:xfrm>
+          <a:prstGeom prst="rect">
+            <a:avLst/>
+          </a:prstGeom>
+          <a:noFill/>
+        </p:spPr>
+        <p:txBody>
+          <a:bodyPr wrap="square" anchor="t" lIns="0" rIns="0" tIns="0" bIns="0">
+            <a:spAutoFit/>
+          </a:bodyPr>
+          <a:lstStyle/>
+          <a:p>
             <a:pPr>
               <a:spcAft>
                 <a:spcPts val="1000"/>
@@ -6470,7 +6476,145 @@
                 </a:solidFill>
                 <a:latin typeface="Calibri"/>
               </a:rPr>
-              <a:t>–   [ ] El documento se llama exactamente `S02_LineaInvestigacion_Apellido`.</a:t>
+              <a:t>–   </a:t>
+            </a:r>
+            <a:r>
+              <a:rPr sz="1600" b="1" i="0">
+                <a:solidFill>
+                  <a:srgbClr val="2B2B2B"/>
+                </a:solidFill>
+                <a:latin typeface="Calibri"/>
+              </a:rPr>
+              <a:t>Quedó bien si</a:t>
+            </a:r>
+            <a:r>
+              <a:rPr sz="1600" b="0" i="0">
+                <a:solidFill>
+                  <a:srgbClr val="2B2B2B"/>
+                </a:solidFill>
+                <a:latin typeface="Calibri"/>
+              </a:rPr>
+              <a:t> —compruébelo usted antes de cerrar el documento—:</a:t>
+            </a:r>
+          </a:p>
+          <a:p>
+            <a:pPr lvl="1">
+              <a:spcAft>
+                <a:spcPts val="600"/>
+              </a:spcAft>
+            </a:pPr>
+            <a:r>
+              <a:rPr sz="1500" b="0" i="0">
+                <a:solidFill>
+                  <a:srgbClr val="2B2B2B"/>
+                </a:solidFill>
+                <a:latin typeface="Calibri"/>
+              </a:rPr>
+              <a:t>●   Al leer </a:t>
+            </a:r>
+            <a:r>
+              <a:rPr sz="1500" b="1" i="0">
+                <a:solidFill>
+                  <a:srgbClr val="2B2B2B"/>
+                </a:solidFill>
+                <a:latin typeface="Calibri"/>
+              </a:rPr>
+              <a:t>solo su párrafo</a:t>
+            </a:r>
+            <a:r>
+              <a:rPr sz="1500" b="0" i="0">
+                <a:solidFill>
+                  <a:srgbClr val="2B2B2B"/>
+                </a:solidFill>
+                <a:latin typeface="Calibri"/>
+              </a:rPr>
+              <a:t>, sin conocer su tema, se entiende </a:t>
+            </a:r>
+            <a:r>
+              <a:rPr sz="1500" b="1" i="0">
+                <a:solidFill>
+                  <a:srgbClr val="2B2B2B"/>
+                </a:solidFill>
+                <a:latin typeface="Calibri"/>
+              </a:rPr>
+              <a:t>por qué esa línea y no la otra</a:t>
+            </a:r>
+            <a:r>
+              <a:rPr sz="1500" b="0" i="0">
+                <a:solidFill>
+                  <a:srgbClr val="2B2B2B"/>
+                </a:solidFill>
+                <a:latin typeface="Calibri"/>
+              </a:rPr>
+              <a:t>.</a:t>
+            </a:r>
+          </a:p>
+          <a:p>
+            <a:pPr lvl="1">
+              <a:spcAft>
+                <a:spcPts val="600"/>
+              </a:spcAft>
+            </a:pPr>
+            <a:r>
+              <a:rPr sz="1500" b="0" i="0">
+                <a:solidFill>
+                  <a:srgbClr val="2B2B2B"/>
+                </a:solidFill>
+                <a:latin typeface="Calibri"/>
+              </a:rPr>
+              <a:t>●   Los dos referentes demuestran que </a:t>
+            </a:r>
+            <a:r>
+              <a:rPr sz="1500" b="1" i="0">
+                <a:solidFill>
+                  <a:srgbClr val="2B2B2B"/>
+                </a:solidFill>
+                <a:latin typeface="Calibri"/>
+              </a:rPr>
+              <a:t>ya existe literatura</a:t>
+            </a:r>
+            <a:r>
+              <a:rPr sz="1500" b="0" i="0">
+                <a:solidFill>
+                  <a:srgbClr val="2B2B2B"/>
+                </a:solidFill>
+                <a:latin typeface="Calibri"/>
+              </a:rPr>
+              <a:t> para trabajarla.</a:t>
+            </a:r>
+          </a:p>
+          <a:p>
+            <a:pPr lvl="1">
+              <a:spcAft>
+                <a:spcPts val="600"/>
+              </a:spcAft>
+            </a:pPr>
+            <a:r>
+              <a:rPr sz="1500" b="0" i="0">
+                <a:solidFill>
+                  <a:srgbClr val="2B2B2B"/>
+                </a:solidFill>
+                <a:latin typeface="Calibri"/>
+              </a:rPr>
+              <a:t>●   Si sus dos referentes no aparecen, la justificación </a:t>
+            </a:r>
+            <a:r>
+              <a:rPr sz="1500" b="1" i="0">
+                <a:solidFill>
+                  <a:srgbClr val="2B2B2B"/>
+                </a:solidFill>
+                <a:latin typeface="Calibri"/>
+              </a:rPr>
+              <a:t>no está terminada</a:t>
+            </a:r>
+            <a:r>
+              <a:rPr sz="1500" b="0" i="0">
+                <a:solidFill>
+                  <a:srgbClr val="2B2B2B"/>
+                </a:solidFill>
+                <a:latin typeface="Calibri"/>
+              </a:rPr>
+              <a:t>: el criterio de fuentes no se cumplió.</a:t>
             </a:r>
           </a:p>
           <a:p>
@@ -6486,7 +6630,7 @@
                 </a:solidFill>
                 <a:latin typeface="Calibri"/>
               </a:rPr>
-              <a:t>–   [ ] Elegí </a:t>
+              <a:t>–   </a:t>
             </a:r>
             <a:r>
               <a:rPr sz="1600" b="1" i="0">
@@ -6495,7 +6639,7 @@
                 </a:solidFill>
                 <a:latin typeface="Calibri"/>
               </a:rPr>
-              <a:t>una sola</a:t>
+              <a:t>Plan B:</a:t>
             </a:r>
             <a:r>
               <a:rPr sz="1600" b="0" i="0">
@@ -6504,7 +6648,25 @@
                 </a:solidFill>
                 <a:latin typeface="Calibri"/>
               </a:rPr>
-              <a:t> línea principal, con el nombre exacto de la lista de seis.</a:t>
+              <a:t> Si no encuentra referentes de su línea, cambie </a:t>
+            </a:r>
+            <a:r>
+              <a:rPr sz="1600" b="1" i="0">
+                <a:solidFill>
+                  <a:srgbClr val="2B2B2B"/>
+                </a:solidFill>
+                <a:latin typeface="Calibri"/>
+              </a:rPr>
+              <a:t>una</a:t>
+            </a:r>
+            <a:r>
+              <a:rPr sz="1600" b="0" i="0">
+                <a:solidFill>
+                  <a:srgbClr val="2B2B2B"/>
+                </a:solidFill>
+                <a:latin typeface="Calibri"/>
+              </a:rPr>
+              <a:t> palabra clave por su sinónimo técnico antes de cambiar de línea: el problema casi siempre es el vocabulario.</a:t>
             </a:r>
           </a:p>
           <a:p>
@@ -6520,7 +6682,7 @@
                 </a:solidFill>
                 <a:latin typeface="Calibri"/>
               </a:rPr>
-              <a:t>–   [ ] Mi párrafo responde a los </a:t>
+              <a:t>–   </a:t>
             </a:r>
             <a:r>
               <a:rPr sz="1600" b="1" i="0">
@@ -6529,7 +6691,7 @@
                 </a:solidFill>
                 <a:latin typeface="Calibri"/>
               </a:rPr>
-              <a:t>tres criterios</a:t>
+              <a:t>Hoy no se sube nada al aula:</a:t>
             </a:r>
             <a:r>
               <a:rPr sz="1600" b="0" i="0">
@@ -6538,7 +6700,25 @@
                 </a:solidFill>
                 <a:latin typeface="Calibri"/>
               </a:rPr>
-              <a:t>, no solo a uno.</a:t>
+              <a:t> guarde `S02_LineaInvestigacion_Apellido` (Google Doc o PDF) en su Drive y tráigalo a la próxima sesión. Es un </a:t>
+            </a:r>
+            <a:r>
+              <a:rPr sz="1600" b="1" i="0">
+                <a:solidFill>
+                  <a:srgbClr val="2B2B2B"/>
+                </a:solidFill>
+                <a:latin typeface="Calibri"/>
+              </a:rPr>
+              <a:t>avance formativo</a:t>
+            </a:r>
+            <a:r>
+              <a:rPr sz="1600" b="0" i="0">
+                <a:solidFill>
+                  <a:srgbClr val="2B2B2B"/>
+                </a:solidFill>
+                <a:latin typeface="Calibri"/>
+              </a:rPr>
+              <a:t>, se revisa en clase.</a:t>
             </a:r>
           </a:p>
           <a:p>
@@ -6554,7 +6734,7 @@
                 </a:solidFill>
                 <a:latin typeface="Calibri"/>
               </a:rPr>
-              <a:t>–   [ ] Digo explícitamente </a:t>
+              <a:t>–   </a:t>
             </a:r>
             <a:r>
               <a:rPr sz="1600" b="1" i="0">
@@ -6563,7 +6743,7 @@
                 </a:solidFill>
                 <a:latin typeface="Calibri"/>
               </a:rPr>
-              <a:t>qué línea descarto y por qué</a:t>
+              <a:t>Esto alimenta:</a:t>
             </a:r>
             <a:r>
               <a:rPr sz="1600" b="0" i="0">
@@ -6572,130 +6752,86 @@
                 </a:solidFill>
                 <a:latin typeface="Calibri"/>
               </a:rPr>
+              <a:t> </a:t>
+            </a:r>
+            <a:r>
+              <a:rPr sz="1600" b="1" i="0">
+                <a:solidFill>
+                  <a:srgbClr val="2B2B2B"/>
+                </a:solidFill>
+                <a:latin typeface="Calibri"/>
+              </a:rPr>
+              <a:t>ACA Final</a:t>
+            </a:r>
+            <a:r>
+              <a:rPr sz="1600" b="0" i="0">
+                <a:solidFill>
+                  <a:srgbClr val="2B2B2B"/>
+                </a:solidFill>
+                <a:latin typeface="Calibri"/>
+              </a:rPr>
+              <a:t> —tarea, 32,8%—, el documento que </a:t>
+            </a:r>
+            <a:r>
+              <a:rPr sz="1600" b="1" i="0">
+                <a:solidFill>
+                  <a:srgbClr val="2B2B2B"/>
+                </a:solidFill>
+                <a:latin typeface="Calibri"/>
+              </a:rPr>
+              <a:t>sí</a:t>
+            </a:r>
+            <a:r>
+              <a:rPr sz="1600" b="0" i="0">
+                <a:solidFill>
+                  <a:srgbClr val="2B2B2B"/>
+                </a:solidFill>
+                <a:latin typeface="Calibri"/>
+              </a:rPr>
+              <a:t> recibe </a:t>
+            </a:r>
+            <a:r>
+              <a:rPr sz="1600" b="1" i="0">
+                <a:solidFill>
+                  <a:srgbClr val="2B2B2B"/>
+                </a:solidFill>
+                <a:latin typeface="Calibri"/>
+              </a:rPr>
+              <a:t>CDigital</a:t>
+            </a:r>
+            <a:r>
+              <a:rPr sz="1600" b="0" i="0">
+                <a:solidFill>
+                  <a:srgbClr val="2B2B2B"/>
+                </a:solidFill>
+                <a:latin typeface="Calibri"/>
+              </a:rPr>
+              <a:t>; cierra en la semana de la </a:t>
+            </a:r>
+            <a:r>
+              <a:rPr sz="1600" b="1" i="0">
+                <a:solidFill>
+                  <a:srgbClr val="2B2B2B"/>
+                </a:solidFill>
+                <a:latin typeface="Calibri"/>
+              </a:rPr>
+              <a:t>Sesión 05</a:t>
+            </a:r>
+            <a:r>
+              <a:rPr sz="1600" b="0" i="0">
+                <a:solidFill>
+                  <a:srgbClr val="2B2B2B"/>
+                </a:solidFill>
+                <a:latin typeface="Calibri"/>
+              </a:rPr>
               <a:t>.</a:t>
             </a:r>
           </a:p>
-          <a:p>
-            <a:pPr>
-              <a:spcAft>
-                <a:spcPts val="1000"/>
-              </a:spcAft>
-            </a:pPr>
-            <a:r>
-              <a:rPr sz="1600" b="0" i="0">
-                <a:solidFill>
-                  <a:srgbClr val="2B2B2B"/>
-                </a:solidFill>
-                <a:latin typeface="Calibri"/>
-              </a:rPr>
-              <a:t>–   [ ] Mis </a:t>
-            </a:r>
-            <a:r>
-              <a:rPr sz="1600" b="1" i="0">
-                <a:solidFill>
-                  <a:srgbClr val="2B2B2B"/>
-                </a:solidFill>
-                <a:latin typeface="Calibri"/>
-              </a:rPr>
-              <a:t>2 referentes existen</a:t>
-            </a:r>
-            <a:r>
-              <a:rPr sz="1600" b="0" i="0">
-                <a:solidFill>
-                  <a:srgbClr val="2B2B2B"/>
-                </a:solidFill>
-                <a:latin typeface="Calibri"/>
-              </a:rPr>
-              <a:t>: los abrí, no solo vi el título en la lista de resultados.</a:t>
-            </a:r>
-          </a:p>
-          <a:p>
-            <a:pPr>
-              <a:spcAft>
-                <a:spcPts val="1000"/>
-              </a:spcAft>
-            </a:pPr>
-            <a:r>
-              <a:rPr sz="1600" b="0" i="0">
-                <a:solidFill>
-                  <a:srgbClr val="2B2B2B"/>
-                </a:solidFill>
-                <a:latin typeface="Calibri"/>
-              </a:rPr>
-              <a:t>–   [ ] Cada referente trae autor, año, título y dónde se publicó.</a:t>
-            </a:r>
-          </a:p>
-          <a:p>
-            <a:pPr>
-              <a:spcAft>
-                <a:spcPts val="1000"/>
-              </a:spcAft>
-            </a:pPr>
-            <a:r>
-              <a:rPr sz="1600" b="0" i="0">
-                <a:solidFill>
-                  <a:srgbClr val="2B2B2B"/>
-                </a:solidFill>
-                <a:latin typeface="Calibri"/>
-              </a:rPr>
-              <a:t>–   [ ] Mi justificación no dice "porque me gusta" ni "porque está de moda".</a:t>
-            </a:r>
-          </a:p>
-          <a:p>
-            <a:pPr>
-              <a:spcAft>
-                <a:spcPts val="1000"/>
-              </a:spcAft>
-            </a:pPr>
-            <a:r>
-              <a:rPr sz="1600" b="0" i="0">
-                <a:solidFill>
-                  <a:srgbClr val="2B2B2B"/>
-                </a:solidFill>
-                <a:latin typeface="Calibri"/>
-              </a:rPr>
-              <a:t>–   [ ] La tabla de decisión está en el documento (es evidencia de que comparé).</a:t>
-            </a:r>
-          </a:p>
-          <a:p>
-            <a:pPr>
-              <a:spcAft>
-                <a:spcPts val="1000"/>
-              </a:spcAft>
-            </a:pPr>
-            <a:r>
-              <a:rPr sz="1600" b="0" i="0">
-                <a:solidFill>
-                  <a:srgbClr val="2B2B2B"/>
-                </a:solidFill>
-                <a:latin typeface="Calibri"/>
-              </a:rPr>
-              <a:t>–   [ ] Subí el archivo a </a:t>
-            </a:r>
-            <a:r>
-              <a:rPr sz="1600" b="1" i="0">
-                <a:solidFill>
-                  <a:srgbClr val="2B2B2B"/>
-                </a:solidFill>
-                <a:latin typeface="Calibri"/>
-              </a:rPr>
-              <a:t>CDigital</a:t>
-            </a:r>
-            <a:r>
-              <a:rPr sz="1600" b="0" i="0">
-                <a:solidFill>
-                  <a:srgbClr val="2B2B2B"/>
-                </a:solidFill>
-                <a:latin typeface="Calibri"/>
-              </a:rPr>
-              <a:t> en el espacio de la sesión: [URL CDigital — campus del curso pendiente]</a:t>
-            </a:r>
-          </a:p>
-        </p:txBody>
-      </p:sp>
-      <p:sp>
-        <p:nvSpPr>
-          <p:cNvPr id="5" name="TextBox 4"/>
+        </p:txBody>
+      </p:sp>
+      <p:sp>
+        <p:nvSpPr>
+          <p:cNvPr id="6" name="TextBox 5"/>
           <p:cNvSpPr txBox="1"/>
           <p:nvPr/>
         </p:nvSpPr>
@@ -6828,7 +6964,7 @@
                 </a:solidFill>
                 <a:latin typeface="Calibri"/>
               </a:rPr>
-              <a:t>Trabajo autónomo · para la próxima sesión</a:t>
+              <a:t>Checklist antes de cerrar su avance</a:t>
             </a:r>
           </a:p>
         </p:txBody>
@@ -6867,43 +7003,7 @@
                 </a:solidFill>
                 <a:latin typeface="Calibri"/>
               </a:rPr>
-              <a:t>–   </a:t>
-            </a:r>
-            <a:r>
-              <a:rPr sz="1600" b="1" i="0">
-                <a:solidFill>
-                  <a:srgbClr val="2B2B2B"/>
-                </a:solidFill>
-                <a:latin typeface="Calibri"/>
-              </a:rPr>
-              <a:t>Afinar los referentes:</a:t>
-            </a:r>
-            <a:r>
-              <a:rPr sz="1600" b="0" i="0">
-                <a:solidFill>
-                  <a:srgbClr val="2B2B2B"/>
-                </a:solidFill>
-                <a:latin typeface="Calibri"/>
-              </a:rPr>
-              <a:t> de los 2 que halló, léales al menos el </a:t>
-            </a:r>
-            <a:r>
-              <a:rPr sz="1600" b="1" i="0">
-                <a:solidFill>
-                  <a:srgbClr val="2B2B2B"/>
-                </a:solidFill>
-                <a:latin typeface="Calibri"/>
-              </a:rPr>
-              <a:t>resumen (abstract)</a:t>
-            </a:r>
-            <a:r>
-              <a:rPr sz="1600" b="0" i="0">
-                <a:solidFill>
-                  <a:srgbClr val="2B2B2B"/>
-                </a:solidFill>
-                <a:latin typeface="Calibri"/>
-              </a:rPr>
-              <a:t> completo y anote en una frase de qué trata cada uno.</a:t>
+              <a:t>–   [ ] El documento se llama exactamente `S02_LineaInvestigacion_Apellido`.</a:t>
             </a:r>
           </a:p>
           <a:p>
@@ -6919,7 +7019,7 @@
                 </a:solidFill>
                 <a:latin typeface="Calibri"/>
               </a:rPr>
-              <a:t>–   </a:t>
+              <a:t>–   [ ] Elegí </a:t>
             </a:r>
             <a:r>
               <a:rPr sz="1600" b="1" i="0">
@@ -6928,7 +7028,7 @@
                 </a:solidFill>
                 <a:latin typeface="Calibri"/>
               </a:rPr>
-              <a:t>Ampliar a 3 o 4</a:t>
+              <a:t>una sola</a:t>
             </a:r>
             <a:r>
               <a:rPr sz="1600" b="0" i="0">
@@ -6937,7 +7037,7 @@
                 </a:solidFill>
                 <a:latin typeface="Calibri"/>
               </a:rPr>
-              <a:t> referentes si puede: son la semilla de su bibliografía.</a:t>
+              <a:t> línea principal, con el nombre exacto de la lista de seis.</a:t>
             </a:r>
           </a:p>
           <a:p>
@@ -6953,7 +7053,7 @@
                 </a:solidFill>
                 <a:latin typeface="Calibri"/>
               </a:rPr>
-              <a:t>–   </a:t>
+              <a:t>–   [ ] Mi párrafo responde a los </a:t>
             </a:r>
             <a:r>
               <a:rPr sz="1600" b="1" i="0">
@@ -6962,7 +7062,7 @@
                 </a:solidFill>
                 <a:latin typeface="Calibri"/>
               </a:rPr>
-              <a:t>Revisar el vocabulario:</a:t>
+              <a:t>tres criterios</a:t>
             </a:r>
             <a:r>
               <a:rPr sz="1600" b="0" i="0">
@@ -6971,7 +7071,7 @@
                 </a:solidFill>
                 <a:latin typeface="Calibri"/>
               </a:rPr>
-              <a:t> anote 5 términos técnicos propios de su línea; los va a necesitar para buscar mejor.</a:t>
+              <a:t>, no solo a uno.</a:t>
             </a:r>
           </a:p>
           <a:p>
@@ -6987,7 +7087,7 @@
                 </a:solidFill>
                 <a:latin typeface="Calibri"/>
               </a:rPr>
-              <a:t>–   </a:t>
+              <a:t>–   [ ] Digo explícitamente </a:t>
             </a:r>
             <a:r>
               <a:rPr sz="1600" b="1" i="0">
@@ -6996,7 +7096,7 @@
                 </a:solidFill>
                 <a:latin typeface="Calibri"/>
               </a:rPr>
-              <a:t>Traiga listos</a:t>
+              <a:t>qué línea descarto y por qué</a:t>
             </a:r>
             <a:r>
               <a:rPr sz="1600" b="0" i="0">
@@ -7005,7 +7105,7 @@
                 </a:solidFill>
                 <a:latin typeface="Calibri"/>
               </a:rPr>
-              <a:t> a la próxima sesión: su tema, su línea y sus referentes.</a:t>
+              <a:t>.</a:t>
             </a:r>
           </a:p>
           <a:p>
@@ -7021,7 +7121,7 @@
                 </a:solidFill>
                 <a:latin typeface="Calibri"/>
               </a:rPr>
-              <a:t>–   La próxima sesión es bisagra: </a:t>
+              <a:t>–   [ ] Mis </a:t>
             </a:r>
             <a:r>
               <a:rPr sz="1600" b="1" i="0">
@@ -7030,7 +7130,7 @@
                 </a:solidFill>
                 <a:latin typeface="Calibri"/>
               </a:rPr>
-              <a:t>prueba parcial y primer avance del artículo</a:t>
+              <a:t>2 referentes existen</a:t>
             </a:r>
             <a:r>
               <a:rPr sz="1600" b="0" i="0">
@@ -7039,41 +7139,7 @@
                 </a:solidFill>
                 <a:latin typeface="Calibri"/>
               </a:rPr>
-              <a:t>.</a:t>
-            </a:r>
-          </a:p>
-          <a:p>
-            <a:pPr lvl="1">
-              <a:spcAft>
-                <a:spcPts val="600"/>
-              </a:spcAft>
-            </a:pPr>
-            <a:r>
-              <a:rPr sz="1500" b="0" i="0">
-                <a:solidFill>
-                  <a:srgbClr val="2B2B2B"/>
-                </a:solidFill>
-                <a:latin typeface="Calibri"/>
-              </a:rPr>
-              <a:t>●   Lo que escriba hoy es </a:t>
-            </a:r>
-            <a:r>
-              <a:rPr sz="1500" b="1" i="0">
-                <a:solidFill>
-                  <a:srgbClr val="2B2B2B"/>
-                </a:solidFill>
-                <a:latin typeface="Calibri"/>
-              </a:rPr>
-              <a:t>materia prima directa</a:t>
-            </a:r>
-            <a:r>
-              <a:rPr sz="1500" b="0" i="0">
-                <a:solidFill>
-                  <a:srgbClr val="2B2B2B"/>
-                </a:solidFill>
-                <a:latin typeface="Calibri"/>
-              </a:rPr>
-              <a:t> de ese avance: si la línea queda floja, el avance queda flojo.</a:t>
+              <a:t>: los abrí, no solo vi el título en la lista de resultados.</a:t>
             </a:r>
           </a:p>
           <a:p>
@@ -7089,7 +7155,55 @@
                 </a:solidFill>
                 <a:latin typeface="Calibri"/>
               </a:rPr>
-              <a:t>–   Toda la entrega y los materiales viven en </a:t>
+              <a:t>–   [ ] Cada referente trae autor, año, título y dónde se publicó.</a:t>
+            </a:r>
+          </a:p>
+          <a:p>
+            <a:pPr>
+              <a:spcAft>
+                <a:spcPts val="1000"/>
+              </a:spcAft>
+            </a:pPr>
+            <a:r>
+              <a:rPr sz="1600" b="0" i="0">
+                <a:solidFill>
+                  <a:srgbClr val="2B2B2B"/>
+                </a:solidFill>
+                <a:latin typeface="Calibri"/>
+              </a:rPr>
+              <a:t>–   [ ] Mi justificación no dice "porque me gusta" ni "porque está de moda".</a:t>
+            </a:r>
+          </a:p>
+          <a:p>
+            <a:pPr>
+              <a:spcAft>
+                <a:spcPts val="1000"/>
+              </a:spcAft>
+            </a:pPr>
+            <a:r>
+              <a:rPr sz="1600" b="0" i="0">
+                <a:solidFill>
+                  <a:srgbClr val="2B2B2B"/>
+                </a:solidFill>
+                <a:latin typeface="Calibri"/>
+              </a:rPr>
+              <a:t>–   [ ] La tabla de decisión está en el documento (es evidencia de que comparé).</a:t>
+            </a:r>
+          </a:p>
+          <a:p>
+            <a:pPr>
+              <a:spcAft>
+                <a:spcPts val="1000"/>
+              </a:spcAft>
+            </a:pPr>
+            <a:r>
+              <a:rPr sz="1600" b="0" i="0">
+                <a:solidFill>
+                  <a:srgbClr val="2B2B2B"/>
+                </a:solidFill>
+                <a:latin typeface="Calibri"/>
+              </a:rPr>
+              <a:t>–   [ ] Guardé el archivo en mi Drive y lo traigo a la próxima sesión: este avance </a:t>
             </a:r>
             <a:r>
               <a:rPr sz="1600" b="1" i="0">
@@ -7098,7 +7212,7 @@
                 </a:solidFill>
                 <a:latin typeface="Calibri"/>
               </a:rPr>
-              <a:t>CDigital</a:t>
+              <a:t>no se sube</a:t>
             </a:r>
             <a:r>
               <a:rPr sz="1600" b="0" i="0">
@@ -7107,7 +7221,25 @@
                 </a:solidFill>
                 <a:latin typeface="Calibri"/>
               </a:rPr>
-              <a:t>: [URL CDigital — campus del curso pendiente]</a:t>
+              <a:t>, alimenta la </a:t>
+            </a:r>
+            <a:r>
+              <a:rPr sz="1600" b="1" i="0">
+                <a:solidFill>
+                  <a:srgbClr val="2B2B2B"/>
+                </a:solidFill>
+                <a:latin typeface="Calibri"/>
+              </a:rPr>
+              <a:t>ACA Final</a:t>
+            </a:r>
+            <a:r>
+              <a:rPr sz="1600" b="0" i="0">
+                <a:solidFill>
+                  <a:srgbClr val="2B2B2B"/>
+                </a:solidFill>
+                <a:latin typeface="Calibri"/>
+              </a:rPr>
+              <a:t>, que es lo que recibe https://cdigital.cun.edu.co/course/view.php?id=111070.</a:t>
             </a:r>
           </a:p>
         </p:txBody>
@@ -7156,6 +7288,2084 @@
 </file>
 
 <file path=ppt/slides/slide19.xml><?xml version="1.0" encoding="utf-8"?>
+<p:sld xmlns:a="http://schemas.openxmlformats.org/drawingml/2006/main" xmlns:p="http://schemas.openxmlformats.org/presentationml/2006/main" xmlns:r="http://schemas.openxmlformats.org/officeDocument/2006/relationships">
+  <p:cSld>
+    <p:bg>
+      <p:bgPr>
+        <a:solidFill>
+          <a:srgbClr val="FFFFFF"/>
+        </a:solidFill>
+        <a:effectLst/>
+      </p:bgPr>
+    </p:bg>
+    <p:spTree>
+      <p:nvGrpSpPr>
+        <p:cNvPr id="1" name=""/>
+        <p:cNvGrpSpPr/>
+        <p:nvPr/>
+      </p:nvGrpSpPr>
+      <p:grpSpPr/>
+      <p:sp>
+        <p:nvSpPr>
+          <p:cNvPr id="2" name="Rectangle 1"/>
+          <p:cNvSpPr/>
+          <p:nvPr/>
+        </p:nvSpPr>
+        <p:spPr>
+          <a:xfrm>
+            <a:off x="0" y="0"/>
+            <a:ext cx="12191695" cy="1188720"/>
+          </a:xfrm>
+          <a:prstGeom prst="rect">
+            <a:avLst/>
+          </a:prstGeom>
+          <a:solidFill>
+            <a:srgbClr val="0C2340"/>
+          </a:solidFill>
+          <a:ln>
+            <a:noFill/>
+          </a:ln>
+          <a:effectLst/>
+        </p:spPr>
+        <p:style>
+          <a:lnRef idx="1">
+            <a:schemeClr val="accent1"/>
+          </a:lnRef>
+          <a:fillRef idx="3">
+            <a:schemeClr val="accent1"/>
+          </a:fillRef>
+          <a:effectRef idx="2">
+            <a:schemeClr val="accent1"/>
+          </a:effectRef>
+          <a:fontRef idx="minor">
+            <a:schemeClr val="lt1"/>
+          </a:fontRef>
+        </p:style>
+        <p:txBody>
+          <a:bodyPr rtlCol="0" anchor="ctr"/>
+          <a:lstStyle/>
+          <a:p>
+            <a:pPr algn="ctr"/>
+          </a:p>
+        </p:txBody>
+      </p:sp>
+      <p:sp>
+        <p:nvSpPr>
+          <p:cNvPr id="3" name="TextBox 2"/>
+          <p:cNvSpPr txBox="1"/>
+          <p:nvPr/>
+        </p:nvSpPr>
+        <p:spPr>
+          <a:xfrm>
+            <a:off x="640080" y="0"/>
+            <a:ext cx="9082735" cy="1188720"/>
+          </a:xfrm>
+          <a:prstGeom prst="rect">
+            <a:avLst/>
+          </a:prstGeom>
+          <a:noFill/>
+        </p:spPr>
+        <p:txBody>
+          <a:bodyPr wrap="square" anchor="ctr" lIns="0" rIns="0" tIns="0" bIns="0">
+            <a:spAutoFit/>
+          </a:bodyPr>
+          <a:lstStyle/>
+          <a:p>
+            <a:pPr algn="ctr"/>
+            <a:r>
+              <a:rPr sz="2600" b="1" i="0">
+                <a:solidFill>
+                  <a:srgbClr val="FFFFFF"/>
+                </a:solidFill>
+                <a:latin typeface="Calibri"/>
+              </a:rPr>
+              <a:t>Trabajo autónomo · para la próxima sesión</a:t>
+            </a:r>
+          </a:p>
+        </p:txBody>
+      </p:sp>
+      <p:sp>
+        <p:nvSpPr>
+          <p:cNvPr id="4" name="TextBox 3"/>
+          <p:cNvSpPr txBox="1"/>
+          <p:nvPr/>
+        </p:nvSpPr>
+        <p:spPr>
+          <a:xfrm>
+            <a:off x="640080" y="1691639"/>
+            <a:ext cx="10911535" cy="4617720"/>
+          </a:xfrm>
+          <a:prstGeom prst="rect">
+            <a:avLst/>
+          </a:prstGeom>
+          <a:noFill/>
+        </p:spPr>
+        <p:txBody>
+          <a:bodyPr wrap="square" anchor="t" lIns="0" rIns="0" tIns="0" bIns="0">
+            <a:spAutoFit/>
+          </a:bodyPr>
+          <a:lstStyle/>
+          <a:p>
+            <a:pPr>
+              <a:spcAft>
+                <a:spcPts val="1000"/>
+              </a:spcAft>
+            </a:pPr>
+            <a:r>
+              <a:rPr sz="1600" b="0" i="0">
+                <a:solidFill>
+                  <a:srgbClr val="2B2B2B"/>
+                </a:solidFill>
+                <a:latin typeface="Calibri"/>
+              </a:rPr>
+              <a:t>–   </a:t>
+            </a:r>
+            <a:r>
+              <a:rPr sz="1600" b="1" i="0">
+                <a:solidFill>
+                  <a:srgbClr val="2B2B2B"/>
+                </a:solidFill>
+                <a:latin typeface="Calibri"/>
+              </a:rPr>
+              <a:t>Afinar los referentes:</a:t>
+            </a:r>
+            <a:r>
+              <a:rPr sz="1600" b="0" i="0">
+                <a:solidFill>
+                  <a:srgbClr val="2B2B2B"/>
+                </a:solidFill>
+                <a:latin typeface="Calibri"/>
+              </a:rPr>
+              <a:t> de los 2 que halló, léales al menos el </a:t>
+            </a:r>
+            <a:r>
+              <a:rPr sz="1600" b="1" i="0">
+                <a:solidFill>
+                  <a:srgbClr val="2B2B2B"/>
+                </a:solidFill>
+                <a:latin typeface="Calibri"/>
+              </a:rPr>
+              <a:t>resumen (abstract)</a:t>
+            </a:r>
+            <a:r>
+              <a:rPr sz="1600" b="0" i="0">
+                <a:solidFill>
+                  <a:srgbClr val="2B2B2B"/>
+                </a:solidFill>
+                <a:latin typeface="Calibri"/>
+              </a:rPr>
+              <a:t> completo y anote en una frase de qué trata cada uno.</a:t>
+            </a:r>
+          </a:p>
+          <a:p>
+            <a:pPr>
+              <a:spcAft>
+                <a:spcPts val="1000"/>
+              </a:spcAft>
+            </a:pPr>
+            <a:r>
+              <a:rPr sz="1600" b="0" i="0">
+                <a:solidFill>
+                  <a:srgbClr val="2B2B2B"/>
+                </a:solidFill>
+                <a:latin typeface="Calibri"/>
+              </a:rPr>
+              <a:t>–   </a:t>
+            </a:r>
+            <a:r>
+              <a:rPr sz="1600" b="1" i="0">
+                <a:solidFill>
+                  <a:srgbClr val="2B2B2B"/>
+                </a:solidFill>
+                <a:latin typeface="Calibri"/>
+              </a:rPr>
+              <a:t>Ampliar a 3 o 4</a:t>
+            </a:r>
+            <a:r>
+              <a:rPr sz="1600" b="0" i="0">
+                <a:solidFill>
+                  <a:srgbClr val="2B2B2B"/>
+                </a:solidFill>
+                <a:latin typeface="Calibri"/>
+              </a:rPr>
+              <a:t> referentes si puede: son la semilla de su bibliografía.</a:t>
+            </a:r>
+          </a:p>
+          <a:p>
+            <a:pPr>
+              <a:spcAft>
+                <a:spcPts val="1000"/>
+              </a:spcAft>
+            </a:pPr>
+            <a:r>
+              <a:rPr sz="1600" b="0" i="0">
+                <a:solidFill>
+                  <a:srgbClr val="2B2B2B"/>
+                </a:solidFill>
+                <a:latin typeface="Calibri"/>
+              </a:rPr>
+              <a:t>–   </a:t>
+            </a:r>
+            <a:r>
+              <a:rPr sz="1600" b="1" i="0">
+                <a:solidFill>
+                  <a:srgbClr val="2B2B2B"/>
+                </a:solidFill>
+                <a:latin typeface="Calibri"/>
+              </a:rPr>
+              <a:t>Revisar el vocabulario:</a:t>
+            </a:r>
+            <a:r>
+              <a:rPr sz="1600" b="0" i="0">
+                <a:solidFill>
+                  <a:srgbClr val="2B2B2B"/>
+                </a:solidFill>
+                <a:latin typeface="Calibri"/>
+              </a:rPr>
+              <a:t> anote 5 términos técnicos propios de su línea; los va a necesitar para buscar mejor.</a:t>
+            </a:r>
+          </a:p>
+          <a:p>
+            <a:pPr>
+              <a:spcAft>
+                <a:spcPts val="1000"/>
+              </a:spcAft>
+            </a:pPr>
+            <a:r>
+              <a:rPr sz="1600" b="0" i="0">
+                <a:solidFill>
+                  <a:srgbClr val="2B2B2B"/>
+                </a:solidFill>
+                <a:latin typeface="Calibri"/>
+              </a:rPr>
+              <a:t>–   </a:t>
+            </a:r>
+            <a:r>
+              <a:rPr sz="1600" b="1" i="0">
+                <a:solidFill>
+                  <a:srgbClr val="2B2B2B"/>
+                </a:solidFill>
+                <a:latin typeface="Calibri"/>
+              </a:rPr>
+              <a:t>Traiga listos</a:t>
+            </a:r>
+            <a:r>
+              <a:rPr sz="1600" b="0" i="0">
+                <a:solidFill>
+                  <a:srgbClr val="2B2B2B"/>
+                </a:solidFill>
+                <a:latin typeface="Calibri"/>
+              </a:rPr>
+              <a:t> a la próxima sesión: su tema, su línea y sus referentes.</a:t>
+            </a:r>
+          </a:p>
+          <a:p>
+            <a:pPr>
+              <a:spcAft>
+                <a:spcPts val="1000"/>
+              </a:spcAft>
+            </a:pPr>
+            <a:r>
+              <a:rPr sz="1600" b="0" i="0">
+                <a:solidFill>
+                  <a:srgbClr val="2B2B2B"/>
+                </a:solidFill>
+                <a:latin typeface="Calibri"/>
+              </a:rPr>
+              <a:t>–   La próxima sesión es bisagra: </a:t>
+            </a:r>
+            <a:r>
+              <a:rPr sz="1600" b="1" i="0">
+                <a:solidFill>
+                  <a:srgbClr val="2B2B2B"/>
+                </a:solidFill>
+                <a:latin typeface="Calibri"/>
+              </a:rPr>
+              <a:t>prueba parcial y primer avance del artículo</a:t>
+            </a:r>
+            <a:r>
+              <a:rPr sz="1600" b="0" i="0">
+                <a:solidFill>
+                  <a:srgbClr val="2B2B2B"/>
+                </a:solidFill>
+                <a:latin typeface="Calibri"/>
+              </a:rPr>
+              <a:t>.</a:t>
+            </a:r>
+          </a:p>
+          <a:p>
+            <a:pPr lvl="1">
+              <a:spcAft>
+                <a:spcPts val="600"/>
+              </a:spcAft>
+            </a:pPr>
+            <a:r>
+              <a:rPr sz="1500" b="0" i="0">
+                <a:solidFill>
+                  <a:srgbClr val="2B2B2B"/>
+                </a:solidFill>
+                <a:latin typeface="Calibri"/>
+              </a:rPr>
+              <a:t>●   Lo que escriba hoy es </a:t>
+            </a:r>
+            <a:r>
+              <a:rPr sz="1500" b="1" i="0">
+                <a:solidFill>
+                  <a:srgbClr val="2B2B2B"/>
+                </a:solidFill>
+                <a:latin typeface="Calibri"/>
+              </a:rPr>
+              <a:t>materia prima directa</a:t>
+            </a:r>
+            <a:r>
+              <a:rPr sz="1500" b="0" i="0">
+                <a:solidFill>
+                  <a:srgbClr val="2B2B2B"/>
+                </a:solidFill>
+                <a:latin typeface="Calibri"/>
+              </a:rPr>
+              <a:t> de ese avance: si la línea queda floja, el avance queda flojo.</a:t>
+            </a:r>
+          </a:p>
+          <a:p>
+            <a:pPr>
+              <a:spcAft>
+                <a:spcPts val="1000"/>
+              </a:spcAft>
+            </a:pPr>
+            <a:r>
+              <a:rPr sz="1600" b="0" i="0">
+                <a:solidFill>
+                  <a:srgbClr val="2B2B2B"/>
+                </a:solidFill>
+                <a:latin typeface="Calibri"/>
+              </a:rPr>
+              <a:t>–   Toda la entrega y los materiales viven en </a:t>
+            </a:r>
+            <a:r>
+              <a:rPr sz="1600" b="1" i="0">
+                <a:solidFill>
+                  <a:srgbClr val="2B2B2B"/>
+                </a:solidFill>
+                <a:latin typeface="Calibri"/>
+              </a:rPr>
+              <a:t>CDigital</a:t>
+            </a:r>
+            <a:r>
+              <a:rPr sz="1600" b="0" i="0">
+                <a:solidFill>
+                  <a:srgbClr val="2B2B2B"/>
+                </a:solidFill>
+                <a:latin typeface="Calibri"/>
+              </a:rPr>
+              <a:t>: https://cdigital.cun.edu.co/course/view.php?id=111070</a:t>
+            </a:r>
+          </a:p>
+        </p:txBody>
+      </p:sp>
+      <p:sp>
+        <p:nvSpPr>
+          <p:cNvPr id="5" name="TextBox 4"/>
+          <p:cNvSpPr txBox="1"/>
+          <p:nvPr/>
+        </p:nvSpPr>
+        <p:spPr>
+          <a:xfrm>
+            <a:off x="11094415" y="6446520"/>
+            <a:ext cx="548640" cy="274320"/>
+          </a:xfrm>
+          <a:prstGeom prst="rect">
+            <a:avLst/>
+          </a:prstGeom>
+          <a:noFill/>
+        </p:spPr>
+        <p:txBody>
+          <a:bodyPr wrap="square" anchor="t" lIns="0" rIns="0" tIns="0" bIns="0">
+            <a:spAutoFit/>
+          </a:bodyPr>
+          <a:lstStyle/>
+          <a:p>
+            <a:pPr algn="r"/>
+            <a:r>
+              <a:rPr sz="1000" b="1" i="0">
+                <a:solidFill>
+                  <a:srgbClr val="8F989D"/>
+                </a:solidFill>
+                <a:latin typeface="Calibri"/>
+              </a:rPr>
+              <a:t>19</a:t>
+            </a:r>
+          </a:p>
+        </p:txBody>
+      </p:sp>
+    </p:spTree>
+  </p:cSld>
+  <p:clrMapOvr>
+    <a:masterClrMapping/>
+  </p:clrMapOvr>
+</p:sld>
+</file>
+
+<file path=ppt/slides/slide2.xml><?xml version="1.0" encoding="utf-8"?>
+<p:sld xmlns:a="http://schemas.openxmlformats.org/drawingml/2006/main" xmlns:p="http://schemas.openxmlformats.org/presentationml/2006/main" xmlns:r="http://schemas.openxmlformats.org/officeDocument/2006/relationships">
+  <p:cSld>
+    <p:bg>
+      <p:bgPr>
+        <a:solidFill>
+          <a:srgbClr val="FFFFFF"/>
+        </a:solidFill>
+        <a:effectLst/>
+      </p:bgPr>
+    </p:bg>
+    <p:spTree>
+      <p:nvGrpSpPr>
+        <p:cNvPr id="1" name=""/>
+        <p:cNvGrpSpPr/>
+        <p:nvPr/>
+      </p:nvGrpSpPr>
+      <p:grpSpPr/>
+      <p:sp>
+        <p:nvSpPr>
+          <p:cNvPr id="2" name="Rectangle 1"/>
+          <p:cNvSpPr/>
+          <p:nvPr/>
+        </p:nvSpPr>
+        <p:spPr>
+          <a:xfrm>
+            <a:off x="0" y="0"/>
+            <a:ext cx="12191695" cy="1188720"/>
+          </a:xfrm>
+          <a:prstGeom prst="rect">
+            <a:avLst/>
+          </a:prstGeom>
+          <a:solidFill>
+            <a:srgbClr val="0C2340"/>
+          </a:solidFill>
+          <a:ln>
+            <a:noFill/>
+          </a:ln>
+          <a:effectLst/>
+        </p:spPr>
+        <p:style>
+          <a:lnRef idx="1">
+            <a:schemeClr val="accent1"/>
+          </a:lnRef>
+          <a:fillRef idx="3">
+            <a:schemeClr val="accent1"/>
+          </a:fillRef>
+          <a:effectRef idx="2">
+            <a:schemeClr val="accent1"/>
+          </a:effectRef>
+          <a:fontRef idx="minor">
+            <a:schemeClr val="lt1"/>
+          </a:fontRef>
+        </p:style>
+        <p:txBody>
+          <a:bodyPr rtlCol="0" anchor="ctr"/>
+          <a:lstStyle/>
+          <a:p>
+            <a:pPr algn="ctr"/>
+          </a:p>
+        </p:txBody>
+      </p:sp>
+      <p:sp>
+        <p:nvSpPr>
+          <p:cNvPr id="3" name="TextBox 2"/>
+          <p:cNvSpPr txBox="1"/>
+          <p:nvPr/>
+        </p:nvSpPr>
+        <p:spPr>
+          <a:xfrm>
+            <a:off x="640080" y="0"/>
+            <a:ext cx="9082735" cy="1188720"/>
+          </a:xfrm>
+          <a:prstGeom prst="rect">
+            <a:avLst/>
+          </a:prstGeom>
+          <a:noFill/>
+        </p:spPr>
+        <p:txBody>
+          <a:bodyPr wrap="square" anchor="ctr" lIns="0" rIns="0" tIns="0" bIns="0">
+            <a:spAutoFit/>
+          </a:bodyPr>
+          <a:lstStyle/>
+          <a:p>
+            <a:pPr algn="ctr"/>
+            <a:r>
+              <a:rPr sz="2600" b="1" i="0">
+                <a:solidFill>
+                  <a:srgbClr val="FFFFFF"/>
+                </a:solidFill>
+                <a:latin typeface="Calibri"/>
+              </a:rPr>
+              <a:t>Su tema todavía no tiene apellido</a:t>
+            </a:r>
+          </a:p>
+        </p:txBody>
+      </p:sp>
+      <p:sp>
+        <p:nvSpPr>
+          <p:cNvPr id="4" name="TextBox 3"/>
+          <p:cNvSpPr txBox="1"/>
+          <p:nvPr/>
+        </p:nvSpPr>
+        <p:spPr>
+          <a:xfrm>
+            <a:off x="640080" y="1691639"/>
+            <a:ext cx="10911535" cy="4617720"/>
+          </a:xfrm>
+          <a:prstGeom prst="rect">
+            <a:avLst/>
+          </a:prstGeom>
+          <a:noFill/>
+        </p:spPr>
+        <p:txBody>
+          <a:bodyPr wrap="square" anchor="t" lIns="0" rIns="0" tIns="0" bIns="0">
+            <a:spAutoFit/>
+          </a:bodyPr>
+          <a:lstStyle/>
+          <a:p>
+            <a:pPr>
+              <a:spcAft>
+                <a:spcPts val="1000"/>
+              </a:spcAft>
+            </a:pPr>
+            <a:r>
+              <a:rPr sz="1600" b="0" i="0">
+                <a:solidFill>
+                  <a:srgbClr val="2B2B2B"/>
+                </a:solidFill>
+                <a:latin typeface="Calibri"/>
+              </a:rPr>
+              <a:t>–   En la sesión anterior cada uno dejó un </a:t>
+            </a:r>
+            <a:r>
+              <a:rPr sz="1600" b="1" i="0">
+                <a:solidFill>
+                  <a:srgbClr val="2B2B2B"/>
+                </a:solidFill>
+                <a:latin typeface="Calibri"/>
+              </a:rPr>
+              <a:t>tema tentativo</a:t>
+            </a:r>
+            <a:r>
+              <a:rPr sz="1600" b="0" i="0">
+                <a:solidFill>
+                  <a:srgbClr val="2B2B2B"/>
+                </a:solidFill>
+                <a:latin typeface="Calibri"/>
+              </a:rPr>
+              <a:t>: "phishing", "deserción", "la red del laboratorio".</a:t>
+            </a:r>
+          </a:p>
+          <a:p>
+            <a:pPr>
+              <a:spcAft>
+                <a:spcPts val="1000"/>
+              </a:spcAft>
+            </a:pPr>
+            <a:r>
+              <a:rPr sz="1600" b="0" i="0">
+                <a:solidFill>
+                  <a:srgbClr val="2B2B2B"/>
+                </a:solidFill>
+                <a:latin typeface="Calibri"/>
+              </a:rPr>
+              <a:t>–   Un tema suelto no se puede investigar: </a:t>
+            </a:r>
+            <a:r>
+              <a:rPr sz="1600" b="1" i="0">
+                <a:solidFill>
+                  <a:srgbClr val="2B2B2B"/>
+                </a:solidFill>
+                <a:latin typeface="Calibri"/>
+              </a:rPr>
+              <a:t>no dice dónde buscar, ni con quién dialogar, ni con qué palabras</a:t>
+            </a:r>
+            <a:r>
+              <a:rPr sz="1600" b="0" i="0">
+                <a:solidFill>
+                  <a:srgbClr val="2B2B2B"/>
+                </a:solidFill>
+                <a:latin typeface="Calibri"/>
+              </a:rPr>
+              <a:t>.</a:t>
+            </a:r>
+          </a:p>
+          <a:p>
+            <a:pPr>
+              <a:spcAft>
+                <a:spcPts val="1000"/>
+              </a:spcAft>
+            </a:pPr>
+            <a:r>
+              <a:rPr sz="1600" b="0" i="0">
+                <a:solidFill>
+                  <a:srgbClr val="2B2B2B"/>
+                </a:solidFill>
+                <a:latin typeface="Calibri"/>
+              </a:rPr>
+              <a:t>–   Hoy le ponemos apellido: lo ubicamos en una </a:t>
+            </a:r>
+            <a:r>
+              <a:rPr sz="1600" b="1" i="0">
+                <a:solidFill>
+                  <a:srgbClr val="2B2B2B"/>
+                </a:solidFill>
+                <a:latin typeface="Calibri"/>
+              </a:rPr>
+              <a:t>línea de investigación</a:t>
+            </a:r>
+            <a:r>
+              <a:rPr sz="1600" b="0" i="0">
+                <a:solidFill>
+                  <a:srgbClr val="2B2B2B"/>
+                </a:solidFill>
+                <a:latin typeface="Calibri"/>
+              </a:rPr>
+              <a:t>.</a:t>
+            </a:r>
+          </a:p>
+          <a:p>
+            <a:pPr>
+              <a:spcAft>
+                <a:spcPts val="1000"/>
+              </a:spcAft>
+            </a:pPr>
+            <a:r>
+              <a:rPr sz="1600" b="0" i="0">
+                <a:solidFill>
+                  <a:srgbClr val="2B2B2B"/>
+                </a:solidFill>
+                <a:latin typeface="Calibri"/>
+              </a:rPr>
+              <a:t>–   Caso concreto: dos estudiantes escriben "seguridad informática".</a:t>
+            </a:r>
+          </a:p>
+          <a:p>
+            <a:pPr lvl="1">
+              <a:spcAft>
+                <a:spcPts val="600"/>
+              </a:spcAft>
+            </a:pPr>
+            <a:r>
+              <a:rPr sz="1500" b="0" i="0">
+                <a:solidFill>
+                  <a:srgbClr val="2B2B2B"/>
+                </a:solidFill>
+                <a:latin typeface="Calibri"/>
+              </a:rPr>
+              <a:t>●   El primero la trabaja como </a:t>
+            </a:r>
+            <a:r>
+              <a:rPr sz="1500" b="1" i="0">
+                <a:solidFill>
+                  <a:srgbClr val="2B2B2B"/>
+                </a:solidFill>
+                <a:latin typeface="Calibri"/>
+              </a:rPr>
+              <a:t>Inteligencia Artificial</a:t>
+            </a:r>
+            <a:r>
+              <a:rPr sz="1500" b="0" i="0">
+                <a:solidFill>
+                  <a:srgbClr val="2B2B2B"/>
+                </a:solidFill>
+                <a:latin typeface="Calibri"/>
+              </a:rPr>
+              <a:t> → busca *phishing detection*, *classifier*, *dataset*.</a:t>
+            </a:r>
+          </a:p>
+          <a:p>
+            <a:pPr lvl="1">
+              <a:spcAft>
+                <a:spcPts val="600"/>
+              </a:spcAft>
+            </a:pPr>
+            <a:r>
+              <a:rPr sz="1500" b="0" i="0">
+                <a:solidFill>
+                  <a:srgbClr val="2B2B2B"/>
+                </a:solidFill>
+                <a:latin typeface="Calibri"/>
+              </a:rPr>
+              <a:t>●   El segundo la trabaja como </a:t>
+            </a:r>
+            <a:r>
+              <a:rPr sz="1500" b="1" i="0">
+                <a:solidFill>
+                  <a:srgbClr val="2B2B2B"/>
+                </a:solidFill>
+                <a:latin typeface="Calibri"/>
+              </a:rPr>
+              <a:t>Telemática</a:t>
+            </a:r>
+            <a:r>
+              <a:rPr sz="1500" b="0" i="0">
+                <a:solidFill>
+                  <a:srgbClr val="2B2B2B"/>
+                </a:solidFill>
+                <a:latin typeface="Calibri"/>
+              </a:rPr>
+              <a:t> → busca *firewall*, *segmentación de red*, *latencia*.</a:t>
+            </a:r>
+          </a:p>
+          <a:p>
+            <a:pPr lvl="1">
+              <a:spcAft>
+                <a:spcPts val="600"/>
+              </a:spcAft>
+            </a:pPr>
+            <a:r>
+              <a:rPr sz="1500" b="0" i="0">
+                <a:solidFill>
+                  <a:srgbClr val="2B2B2B"/>
+                </a:solidFill>
+                <a:latin typeface="Calibri"/>
+              </a:rPr>
+              <a:t>●   Mismo tema, </a:t>
+            </a:r>
+            <a:r>
+              <a:rPr sz="1500" b="1" i="0">
+                <a:solidFill>
+                  <a:srgbClr val="2B2B2B"/>
+                </a:solidFill>
+                <a:latin typeface="Calibri"/>
+              </a:rPr>
+              <a:t>dos bibliografías que casi no se cruzan</a:t>
+            </a:r>
+            <a:r>
+              <a:rPr sz="1500" b="0" i="0">
+                <a:solidFill>
+                  <a:srgbClr val="2B2B2B"/>
+                </a:solidFill>
+                <a:latin typeface="Calibri"/>
+              </a:rPr>
+              <a:t> y dos artículos distintos.</a:t>
+            </a:r>
+          </a:p>
+          <a:p>
+            <a:pPr>
+              <a:spcAft>
+                <a:spcPts val="1000"/>
+              </a:spcAft>
+            </a:pPr>
+            <a:r>
+              <a:rPr sz="1600" b="0" i="0">
+                <a:solidFill>
+                  <a:srgbClr val="2B2B2B"/>
+                </a:solidFill>
+                <a:latin typeface="Calibri"/>
+              </a:rPr>
+              <a:t>–   Elegir bien la línea le ahorra semanas de búsqueda perdida; elegirla mal lo obliga a reescribir el marco.</a:t>
+            </a:r>
+          </a:p>
+        </p:txBody>
+      </p:sp>
+      <p:sp>
+        <p:nvSpPr>
+          <p:cNvPr id="5" name="TextBox 4"/>
+          <p:cNvSpPr txBox="1"/>
+          <p:nvPr/>
+        </p:nvSpPr>
+        <p:spPr>
+          <a:xfrm>
+            <a:off x="11094415" y="6446520"/>
+            <a:ext cx="548640" cy="274320"/>
+          </a:xfrm>
+          <a:prstGeom prst="rect">
+            <a:avLst/>
+          </a:prstGeom>
+          <a:noFill/>
+        </p:spPr>
+        <p:txBody>
+          <a:bodyPr wrap="square" anchor="t" lIns="0" rIns="0" tIns="0" bIns="0">
+            <a:spAutoFit/>
+          </a:bodyPr>
+          <a:lstStyle/>
+          <a:p>
+            <a:pPr algn="r"/>
+            <a:r>
+              <a:rPr sz="1000" b="1" i="0">
+                <a:solidFill>
+                  <a:srgbClr val="8F989D"/>
+                </a:solidFill>
+                <a:latin typeface="Calibri"/>
+              </a:rPr>
+              <a:t>2</a:t>
+            </a:r>
+          </a:p>
+        </p:txBody>
+      </p:sp>
+      <p:sp>
+        <p:nvSpPr>
+          <p:cNvPr id="6" name="TextBox 5"/>
+          <p:cNvSpPr txBox="1"/>
+          <p:nvPr/>
+        </p:nvSpPr>
+        <p:spPr>
+          <a:xfrm>
+            <a:off x="640080" y="5943600"/>
+            <a:ext cx="9997135" cy="457200"/>
+          </a:xfrm>
+          <a:prstGeom prst="rect">
+            <a:avLst/>
+          </a:prstGeom>
+          <a:noFill/>
+        </p:spPr>
+        <p:txBody>
+          <a:bodyPr wrap="square" anchor="t" lIns="0" rIns="0" tIns="0" bIns="0">
+            <a:spAutoFit/>
+          </a:bodyPr>
+          <a:lstStyle/>
+          <a:p>
+            <a:r>
+              <a:rPr sz="1200" b="0" i="1">
+                <a:solidFill>
+                  <a:srgbClr val="2B2B2B"/>
+                </a:solidFill>
+                <a:latin typeface="Calibri"/>
+              </a:rPr>
+              <a:t>Al final de esta sesión usted sale con </a:t>
+            </a:r>
+            <a:r>
+              <a:rPr sz="1200" b="1" i="1">
+                <a:solidFill>
+                  <a:srgbClr val="2B2B2B"/>
+                </a:solidFill>
+                <a:latin typeface="Calibri"/>
+              </a:rPr>
+              <a:t>una línea elegida y justificada por escrito</a:t>
+            </a:r>
+            <a:r>
+              <a:rPr sz="1200" b="0" i="1">
+                <a:solidFill>
+                  <a:srgbClr val="2B2B2B"/>
+                </a:solidFill>
+                <a:latin typeface="Calibri"/>
+              </a:rPr>
+              <a:t>, no con una intención.</a:t>
+            </a:r>
+          </a:p>
+        </p:txBody>
+      </p:sp>
+    </p:spTree>
+  </p:cSld>
+  <p:clrMapOvr>
+    <a:masterClrMapping/>
+  </p:clrMapOvr>
+</p:sld>
+</file>
+
+<file path=ppt/slides/slide20.xml><?xml version="1.0" encoding="utf-8"?>
+<p:sld xmlns:a="http://schemas.openxmlformats.org/drawingml/2006/main" xmlns:p="http://schemas.openxmlformats.org/presentationml/2006/main" xmlns:r="http://schemas.openxmlformats.org/officeDocument/2006/relationships">
+  <p:cSld>
+    <p:bg>
+      <p:bgPr>
+        <a:solidFill>
+          <a:srgbClr val="FFFFFF"/>
+        </a:solidFill>
+        <a:effectLst/>
+      </p:bgPr>
+    </p:bg>
+    <p:spTree>
+      <p:nvGrpSpPr>
+        <p:cNvPr id="1" name=""/>
+        <p:cNvGrpSpPr/>
+        <p:nvPr/>
+      </p:nvGrpSpPr>
+      <p:grpSpPr/>
+      <p:sp>
+        <p:nvSpPr>
+          <p:cNvPr id="2" name="Rectangle 1"/>
+          <p:cNvSpPr/>
+          <p:nvPr/>
+        </p:nvSpPr>
+        <p:spPr>
+          <a:xfrm>
+            <a:off x="0" y="0"/>
+            <a:ext cx="12191695" cy="1188720"/>
+          </a:xfrm>
+          <a:prstGeom prst="rect">
+            <a:avLst/>
+          </a:prstGeom>
+          <a:solidFill>
+            <a:srgbClr val="0C2340"/>
+          </a:solidFill>
+          <a:ln>
+            <a:noFill/>
+          </a:ln>
+          <a:effectLst/>
+        </p:spPr>
+        <p:style>
+          <a:lnRef idx="1">
+            <a:schemeClr val="accent1"/>
+          </a:lnRef>
+          <a:fillRef idx="3">
+            <a:schemeClr val="accent1"/>
+          </a:fillRef>
+          <a:effectRef idx="2">
+            <a:schemeClr val="accent1"/>
+          </a:effectRef>
+          <a:fontRef idx="minor">
+            <a:schemeClr val="lt1"/>
+          </a:fontRef>
+        </p:style>
+        <p:txBody>
+          <a:bodyPr rtlCol="0" anchor="ctr"/>
+          <a:lstStyle/>
+          <a:p>
+            <a:pPr algn="ctr"/>
+          </a:p>
+        </p:txBody>
+      </p:sp>
+      <p:sp>
+        <p:nvSpPr>
+          <p:cNvPr id="3" name="TextBox 2"/>
+          <p:cNvSpPr txBox="1"/>
+          <p:nvPr/>
+        </p:nvSpPr>
+        <p:spPr>
+          <a:xfrm>
+            <a:off x="640080" y="0"/>
+            <a:ext cx="9082735" cy="1188720"/>
+          </a:xfrm>
+          <a:prstGeom prst="rect">
+            <a:avLst/>
+          </a:prstGeom>
+          <a:noFill/>
+        </p:spPr>
+        <p:txBody>
+          <a:bodyPr wrap="square" anchor="ctr" lIns="0" rIns="0" tIns="0" bIns="0">
+            <a:spAutoFit/>
+          </a:bodyPr>
+          <a:lstStyle/>
+          <a:p>
+            <a:pPr algn="ctr"/>
+            <a:r>
+              <a:rPr sz="2600" b="1" i="0">
+                <a:solidFill>
+                  <a:srgbClr val="FFFFFF"/>
+                </a:solidFill>
+                <a:latin typeface="Calibri"/>
+              </a:rPr>
+              <a:t>RUTA DE ENTREGABLES DEL CURSO</a:t>
+            </a:r>
+          </a:p>
+        </p:txBody>
+      </p:sp>
+      <p:sp>
+        <p:nvSpPr>
+          <p:cNvPr id="4" name="TextBox 3"/>
+          <p:cNvSpPr txBox="1"/>
+          <p:nvPr/>
+        </p:nvSpPr>
+        <p:spPr>
+          <a:xfrm>
+            <a:off x="640080" y="1280160"/>
+            <a:ext cx="10911535" cy="411480"/>
+          </a:xfrm>
+          <a:prstGeom prst="rect">
+            <a:avLst/>
+          </a:prstGeom>
+          <a:noFill/>
+        </p:spPr>
+        <p:txBody>
+          <a:bodyPr wrap="square" anchor="t" lIns="0" rIns="0" tIns="0" bIns="0">
+            <a:spAutoFit/>
+          </a:bodyPr>
+          <a:lstStyle/>
+          <a:p>
+            <a:pPr algn="ctr"/>
+            <a:r>
+              <a:rPr sz="1500" b="0" i="0">
+                <a:solidFill>
+                  <a:srgbClr val="2B2B2B"/>
+                </a:solidFill>
+                <a:latin typeface="Calibri"/>
+              </a:rPr>
+              <a:t>Sin fechas a propósito: aquí va </a:t>
+            </a:r>
+            <a:r>
+              <a:rPr sz="1500" b="1" i="0">
+                <a:solidFill>
+                  <a:srgbClr val="2B2B2B"/>
+                </a:solidFill>
+                <a:latin typeface="Calibri"/>
+              </a:rPr>
+              <a:t>en qué punto del curso</a:t>
+            </a:r>
+            <a:r>
+              <a:rPr sz="1500" b="0" i="0">
+                <a:solidFill>
+                  <a:srgbClr val="2B2B2B"/>
+                </a:solidFill>
+                <a:latin typeface="Calibri"/>
+              </a:rPr>
+              <a:t> cierra cada ítem · la ventana exacta la fija CDigital</a:t>
+            </a:r>
+          </a:p>
+        </p:txBody>
+      </p:sp>
+      <p:graphicFrame>
+        <p:nvGraphicFramePr>
+          <p:cNvPr id="5" name="Table 4"/>
+          <p:cNvGraphicFramePr>
+            <a:graphicFrameLocks noGrp="1"/>
+          </p:cNvGraphicFramePr>
+          <p:nvPr/>
+        </p:nvGraphicFramePr>
+        <p:xfrm>
+          <a:off x="640080" y="2011679"/>
+          <a:ext cx="10911533" cy="4297680"/>
+        </p:xfrm>
+        <a:graphic>
+          <a:graphicData uri="http://schemas.openxmlformats.org/drawingml/2006/table">
+            <a:tbl>
+              <a:tblPr>
+                <a:tableStyleId>{2D5ABB26-0587-4C30-8999-92F81FD0307C}</a:tableStyleId>
+              </a:tblPr>
+              <a:tblGrid>
+                <a:gridCol w="2659113"/>
+                <a:gridCol w="2659113"/>
+                <a:gridCol w="5593307"/>
+              </a:tblGrid>
+              <a:tr h="477520">
+                <a:tc>
+                  <a:txBody>
+                    <a:bodyPr/>
+                    <a:lstStyle/>
+                    <a:p>
+                      <a:pPr algn="l"/>
+                      <a:r>
+                        <a:rPr sz="1300" b="1" i="0">
+                          <a:solidFill>
+                            <a:srgbClr val="FFFFFF"/>
+                          </a:solidFill>
+                          <a:latin typeface="Calibri"/>
+                        </a:rPr>
+                        <a:t>Cierra en la semana de…</a:t>
+                      </a:r>
+                    </a:p>
+                  </a:txBody>
+                  <a:tcPr anchor="ctr" marL="109728" marR="91440" marT="36576" marB="36576">
+                    <a:solidFill>
+                      <a:srgbClr val="0C2340"/>
+                    </a:solidFill>
+                  </a:tcPr>
+                </a:tc>
+                <a:tc>
+                  <a:txBody>
+                    <a:bodyPr/>
+                    <a:lstStyle/>
+                    <a:p>
+                      <a:pPr algn="l"/>
+                      <a:r>
+                        <a:rPr sz="1300" b="1" i="0">
+                          <a:solidFill>
+                            <a:srgbClr val="FFFFFF"/>
+                          </a:solidFill>
+                          <a:latin typeface="Calibri"/>
+                        </a:rPr>
+                        <a:t>Entregable</a:t>
+                      </a:r>
+                    </a:p>
+                  </a:txBody>
+                  <a:tcPr anchor="ctr" marL="109728" marR="91440" marT="36576" marB="36576">
+                    <a:solidFill>
+                      <a:srgbClr val="0C2340"/>
+                    </a:solidFill>
+                  </a:tcPr>
+                </a:tc>
+                <a:tc>
+                  <a:txBody>
+                    <a:bodyPr/>
+                    <a:lstStyle/>
+                    <a:p>
+                      <a:pPr algn="l"/>
+                      <a:r>
+                        <a:rPr sz="1300" b="1" i="0">
+                          <a:solidFill>
+                            <a:srgbClr val="FFFFFF"/>
+                          </a:solidFill>
+                          <a:latin typeface="Calibri"/>
+                        </a:rPr>
+                        <a:t>Qué debes tener listo</a:t>
+                      </a:r>
+                    </a:p>
+                  </a:txBody>
+                  <a:tcPr anchor="ctr" marL="109728" marR="91440" marT="36576" marB="36576">
+                    <a:solidFill>
+                      <a:srgbClr val="0C2340"/>
+                    </a:solidFill>
+                  </a:tcPr>
+                </a:tc>
+              </a:tr>
+              <a:tr h="477520">
+                <a:tc>
+                  <a:txBody>
+                    <a:bodyPr/>
+                    <a:lstStyle/>
+                    <a:p>
+                      <a:pPr algn="l"/>
+                      <a:r>
+                        <a:rPr sz="1100" b="1" i="0">
+                          <a:solidFill>
+                            <a:srgbClr val="2B2B2B"/>
+                          </a:solidFill>
+                          <a:latin typeface="Calibri"/>
+                        </a:rPr>
+                        <a:t>Sesión 02</a:t>
+                      </a:r>
+                      <a:r>
+                        <a:rPr sz="1100" b="0" i="0">
+                          <a:solidFill>
+                            <a:srgbClr val="2B2B2B"/>
+                          </a:solidFill>
+                          <a:latin typeface="Calibri"/>
+                        </a:rPr>
+                        <a:t> · cierra esta semana</a:t>
+                      </a:r>
+                    </a:p>
+                  </a:txBody>
+                  <a:tcPr anchor="ctr" marL="109728" marR="91440" marT="36576" marB="36576">
+                    <a:solidFill>
+                      <a:srgbClr val="FFFFFF"/>
+                    </a:solidFill>
+                  </a:tcPr>
+                </a:tc>
+                <a:tc>
+                  <a:txBody>
+                    <a:bodyPr/>
+                    <a:lstStyle/>
+                    <a:p>
+                      <a:pPr algn="l"/>
+                      <a:r>
+                        <a:rPr sz="1100" b="1" i="0">
+                          <a:solidFill>
+                            <a:srgbClr val="2B2B2B"/>
+                          </a:solidFill>
+                          <a:latin typeface="Calibri"/>
+                        </a:rPr>
+                        <a:t>Quiz 1</a:t>
+                      </a:r>
+                      <a:r>
+                        <a:rPr sz="1100" b="0" i="0">
+                          <a:solidFill>
+                            <a:srgbClr val="2B2B2B"/>
+                          </a:solidFill>
+                          <a:latin typeface="Calibri"/>
+                        </a:rPr>
+                        <a:t> · Cuestionario · 6%</a:t>
+                      </a:r>
+                    </a:p>
+                  </a:txBody>
+                  <a:tcPr anchor="ctr" marL="109728" marR="91440" marT="36576" marB="36576">
+                    <a:solidFill>
+                      <a:srgbClr val="FFFFFF"/>
+                    </a:solidFill>
+                  </a:tcPr>
+                </a:tc>
+                <a:tc>
+                  <a:txBody>
+                    <a:bodyPr/>
+                    <a:lstStyle/>
+                    <a:p>
+                      <a:pPr algn="l"/>
+                      <a:r>
+                        <a:rPr sz="1100" b="0" i="0">
+                          <a:solidFill>
+                            <a:srgbClr val="2B2B2B"/>
+                          </a:solidFill>
+                          <a:latin typeface="Calibri"/>
+                        </a:rPr>
+                        <a:t>Ten claras las </a:t>
+                      </a:r>
+                      <a:r>
+                        <a:rPr sz="1100" b="1" i="0">
+                          <a:solidFill>
+                            <a:srgbClr val="2B2B2B"/>
+                          </a:solidFill>
+                          <a:latin typeface="Calibri"/>
+                        </a:rPr>
+                        <a:t>etapas del método</a:t>
+                      </a:r>
+                      <a:r>
+                        <a:rPr sz="1100" b="0" i="0">
+                          <a:solidFill>
+                            <a:srgbClr val="2B2B2B"/>
+                          </a:solidFill>
+                          <a:latin typeface="Calibri"/>
+                        </a:rPr>
+                        <a:t> y qué es un artículo de nuevo conocimiento.</a:t>
+                      </a:r>
+                    </a:p>
+                  </a:txBody>
+                  <a:tcPr anchor="ctr" marL="109728" marR="91440" marT="36576" marB="36576">
+                    <a:solidFill>
+                      <a:srgbClr val="FFFFFF"/>
+                    </a:solidFill>
+                  </a:tcPr>
+                </a:tc>
+              </a:tr>
+              <a:tr h="477520">
+                <a:tc>
+                  <a:txBody>
+                    <a:bodyPr/>
+                    <a:lstStyle/>
+                    <a:p>
+                      <a:pPr algn="l"/>
+                      <a:r>
+                        <a:rPr sz="1100" b="1" i="0">
+                          <a:solidFill>
+                            <a:srgbClr val="2B2B2B"/>
+                          </a:solidFill>
+                          <a:latin typeface="Calibri"/>
+                        </a:rPr>
+                        <a:t>Sesión 03</a:t>
+                      </a:r>
+                      <a:r>
+                        <a:rPr sz="1100" b="0" i="0">
+                          <a:solidFill>
+                            <a:srgbClr val="2B2B2B"/>
+                          </a:solidFill>
+                          <a:latin typeface="Calibri"/>
+                        </a:rPr>
+                        <a:t> · pendiente</a:t>
+                      </a:r>
+                    </a:p>
+                  </a:txBody>
+                  <a:tcPr anchor="ctr" marL="109728" marR="91440" marT="36576" marB="36576">
+                    <a:solidFill>
+                      <a:srgbClr val="F2F2F2"/>
+                    </a:solidFill>
+                  </a:tcPr>
+                </a:tc>
+                <a:tc>
+                  <a:txBody>
+                    <a:bodyPr/>
+                    <a:lstStyle/>
+                    <a:p>
+                      <a:pPr algn="l"/>
+                      <a:r>
+                        <a:rPr sz="1100" b="1" i="0">
+                          <a:solidFill>
+                            <a:srgbClr val="2B2B2B"/>
+                          </a:solidFill>
+                          <a:latin typeface="Calibri"/>
+                        </a:rPr>
+                        <a:t>Parcial 1</a:t>
+                      </a:r>
+                      <a:r>
+                        <a:rPr sz="1100" b="0" i="0">
+                          <a:solidFill>
+                            <a:srgbClr val="2B2B2B"/>
+                          </a:solidFill>
+                          <a:latin typeface="Calibri"/>
+                        </a:rPr>
+                        <a:t> · Cuestionario · 24%</a:t>
+                      </a:r>
+                    </a:p>
+                  </a:txBody>
+                  <a:tcPr anchor="ctr" marL="109728" marR="91440" marT="36576" marB="36576">
+                    <a:solidFill>
+                      <a:srgbClr val="F2F2F2"/>
+                    </a:solidFill>
+                  </a:tcPr>
+                </a:tc>
+                <a:tc>
+                  <a:txBody>
+                    <a:bodyPr/>
+                    <a:lstStyle/>
+                    <a:p>
+                      <a:pPr algn="l"/>
+                      <a:r>
+                        <a:rPr sz="1100" b="0" i="0">
+                          <a:solidFill>
+                            <a:srgbClr val="2B2B2B"/>
+                          </a:solidFill>
+                          <a:latin typeface="Calibri"/>
+                        </a:rPr>
+                        <a:t>Ten memorizadas las </a:t>
+                      </a:r>
+                      <a:r>
+                        <a:rPr sz="1100" b="1" i="0">
+                          <a:solidFill>
+                            <a:srgbClr val="2B2B2B"/>
+                          </a:solidFill>
+                          <a:latin typeface="Calibri"/>
+                        </a:rPr>
+                        <a:t>6 líneas</a:t>
+                      </a:r>
+                      <a:r>
+                        <a:rPr sz="1100" b="0" i="0">
+                          <a:solidFill>
+                            <a:srgbClr val="2B2B2B"/>
+                          </a:solidFill>
+                          <a:latin typeface="Calibri"/>
+                        </a:rPr>
+                        <a:t> de MinCiencias y en cuál se ubica tu tema, y por qué.</a:t>
+                      </a:r>
+                    </a:p>
+                  </a:txBody>
+                  <a:tcPr anchor="ctr" marL="109728" marR="91440" marT="36576" marB="36576">
+                    <a:solidFill>
+                      <a:srgbClr val="F2F2F2"/>
+                    </a:solidFill>
+                  </a:tcPr>
+                </a:tc>
+              </a:tr>
+              <a:tr h="477520">
+                <a:tc>
+                  <a:txBody>
+                    <a:bodyPr/>
+                    <a:lstStyle/>
+                    <a:p>
+                      <a:pPr algn="l"/>
+                      <a:r>
+                        <a:rPr sz="1100" b="1" i="0">
+                          <a:solidFill>
+                            <a:srgbClr val="2B2B2B"/>
+                          </a:solidFill>
+                          <a:latin typeface="Calibri"/>
+                        </a:rPr>
+                        <a:t>Sesión 04</a:t>
+                      </a:r>
+                      <a:r>
+                        <a:rPr sz="1100" b="0" i="0">
+                          <a:solidFill>
+                            <a:srgbClr val="2B2B2B"/>
+                          </a:solidFill>
+                          <a:latin typeface="Calibri"/>
+                        </a:rPr>
+                        <a:t> · pendiente</a:t>
+                      </a:r>
+                    </a:p>
+                  </a:txBody>
+                  <a:tcPr anchor="ctr" marL="109728" marR="91440" marT="36576" marB="36576">
+                    <a:solidFill>
+                      <a:srgbClr val="FFFFFF"/>
+                    </a:solidFill>
+                  </a:tcPr>
+                </a:tc>
+                <a:tc>
+                  <a:txBody>
+                    <a:bodyPr/>
+                    <a:lstStyle/>
+                    <a:p>
+                      <a:pPr algn="l"/>
+                      <a:r>
+                        <a:rPr sz="1100" b="1" i="0">
+                          <a:solidFill>
+                            <a:srgbClr val="2B2B2B"/>
+                          </a:solidFill>
+                          <a:latin typeface="Calibri"/>
+                        </a:rPr>
+                        <a:t>Quiz 2</a:t>
+                      </a:r>
+                      <a:r>
+                        <a:rPr sz="1100" b="0" i="0">
+                          <a:solidFill>
+                            <a:srgbClr val="2B2B2B"/>
+                          </a:solidFill>
+                          <a:latin typeface="Calibri"/>
+                        </a:rPr>
+                        <a:t> · Cuestionario · 9%</a:t>
+                      </a:r>
+                    </a:p>
+                  </a:txBody>
+                  <a:tcPr anchor="ctr" marL="109728" marR="91440" marT="36576" marB="36576">
+                    <a:solidFill>
+                      <a:srgbClr val="FFFFFF"/>
+                    </a:solidFill>
+                  </a:tcPr>
+                </a:tc>
+                <a:tc>
+                  <a:txBody>
+                    <a:bodyPr/>
+                    <a:lstStyle/>
+                    <a:p>
+                      <a:pPr algn="l"/>
+                      <a:r>
+                        <a:rPr sz="1100" b="0" i="0">
+                          <a:solidFill>
+                            <a:srgbClr val="2B2B2B"/>
+                          </a:solidFill>
+                          <a:latin typeface="Calibri"/>
+                        </a:rPr>
+                        <a:t>Distingue </a:t>
+                      </a:r>
+                      <a:r>
+                        <a:rPr sz="1100" b="1" i="0">
+                          <a:solidFill>
+                            <a:srgbClr val="2B2B2B"/>
+                          </a:solidFill>
+                          <a:latin typeface="Calibri"/>
+                        </a:rPr>
+                        <a:t>tipos de fuente</a:t>
+                      </a:r>
+                      <a:r>
+                        <a:rPr sz="1100" b="0" i="0">
+                          <a:solidFill>
+                            <a:srgbClr val="2B2B2B"/>
+                          </a:solidFill>
+                          <a:latin typeface="Calibri"/>
+                        </a:rPr>
+                        <a:t> y qué la hace confiable: quién firma, dónde y de cuándo es.</a:t>
+                      </a:r>
+                    </a:p>
+                  </a:txBody>
+                  <a:tcPr anchor="ctr" marL="109728" marR="91440" marT="36576" marB="36576">
+                    <a:solidFill>
+                      <a:srgbClr val="FFFFFF"/>
+                    </a:solidFill>
+                  </a:tcPr>
+                </a:tc>
+              </a:tr>
+              <a:tr h="477520">
+                <a:tc>
+                  <a:txBody>
+                    <a:bodyPr/>
+                    <a:lstStyle/>
+                    <a:p>
+                      <a:pPr algn="l"/>
+                      <a:r>
+                        <a:rPr sz="1100" b="1" i="0">
+                          <a:solidFill>
+                            <a:srgbClr val="2B2B2B"/>
+                          </a:solidFill>
+                          <a:latin typeface="Calibri"/>
+                        </a:rPr>
+                        <a:t>Sesión 05</a:t>
+                      </a:r>
+                      <a:r>
+                        <a:rPr sz="1100" b="0" i="0">
+                          <a:solidFill>
+                            <a:srgbClr val="2B2B2B"/>
+                          </a:solidFill>
+                          <a:latin typeface="Calibri"/>
+                        </a:rPr>
+                        <a:t> · pendiente</a:t>
+                      </a:r>
+                    </a:p>
+                  </a:txBody>
+                  <a:tcPr anchor="ctr" marL="109728" marR="91440" marT="36576" marB="36576">
+                    <a:solidFill>
+                      <a:srgbClr val="F2F2F2"/>
+                    </a:solidFill>
+                  </a:tcPr>
+                </a:tc>
+                <a:tc>
+                  <a:txBody>
+                    <a:bodyPr/>
+                    <a:lstStyle/>
+                    <a:p>
+                      <a:pPr algn="l"/>
+                      <a:r>
+                        <a:rPr sz="1100" b="1" i="0">
+                          <a:solidFill>
+                            <a:srgbClr val="2B2B2B"/>
+                          </a:solidFill>
+                          <a:latin typeface="Calibri"/>
+                        </a:rPr>
+                        <a:t>Parcial 2</a:t>
+                      </a:r>
+                      <a:r>
+                        <a:rPr sz="1100" b="0" i="0">
+                          <a:solidFill>
+                            <a:srgbClr val="2B2B2B"/>
+                          </a:solidFill>
+                          <a:latin typeface="Calibri"/>
+                        </a:rPr>
+                        <a:t> · Cuestionario · 21%</a:t>
+                      </a:r>
+                    </a:p>
+                  </a:txBody>
+                  <a:tcPr anchor="ctr" marL="109728" marR="91440" marT="36576" marB="36576">
+                    <a:solidFill>
+                      <a:srgbClr val="F2F2F2"/>
+                    </a:solidFill>
+                  </a:tcPr>
+                </a:tc>
+                <a:tc>
+                  <a:txBody>
+                    <a:bodyPr/>
+                    <a:lstStyle/>
+                    <a:p>
+                      <a:pPr algn="l"/>
+                      <a:r>
+                        <a:rPr sz="1100" b="0" i="0">
+                          <a:solidFill>
+                            <a:srgbClr val="2B2B2B"/>
+                          </a:solidFill>
+                          <a:latin typeface="Calibri"/>
+                        </a:rPr>
+                        <a:t>Domina problema, pregunta y objetivo, búsqueda con operadores y citas en </a:t>
+                      </a:r>
+                      <a:r>
+                        <a:rPr sz="1100" b="1" i="0">
+                          <a:solidFill>
+                            <a:srgbClr val="2B2B2B"/>
+                          </a:solidFill>
+                          <a:latin typeface="Calibri"/>
+                        </a:rPr>
+                        <a:t>APA 7</a:t>
+                      </a:r>
+                      <a:r>
+                        <a:rPr sz="1100" b="0" i="0">
+                          <a:solidFill>
+                            <a:srgbClr val="2B2B2B"/>
+                          </a:solidFill>
+                          <a:latin typeface="Calibri"/>
+                        </a:rPr>
+                        <a:t>.</a:t>
+                      </a:r>
+                    </a:p>
+                  </a:txBody>
+                  <a:tcPr anchor="ctr" marL="109728" marR="91440" marT="36576" marB="36576">
+                    <a:solidFill>
+                      <a:srgbClr val="F2F2F2"/>
+                    </a:solidFill>
+                  </a:tcPr>
+                </a:tc>
+              </a:tr>
+              <a:tr h="477520">
+                <a:tc>
+                  <a:txBody>
+                    <a:bodyPr/>
+                    <a:lstStyle/>
+                    <a:p>
+                      <a:pPr algn="l"/>
+                      <a:r>
+                        <a:rPr sz="1100" b="1" i="0">
+                          <a:solidFill>
+                            <a:srgbClr val="2B2B2B"/>
+                          </a:solidFill>
+                          <a:latin typeface="Calibri"/>
+                        </a:rPr>
+                        <a:t>Sesión 05</a:t>
+                      </a:r>
+                      <a:r>
+                        <a:rPr sz="1100" b="0" i="0">
+                          <a:solidFill>
+                            <a:srgbClr val="2B2B2B"/>
+                          </a:solidFill>
+                          <a:latin typeface="Calibri"/>
+                        </a:rPr>
+                        <a:t> · pendiente</a:t>
+                      </a:r>
+                    </a:p>
+                  </a:txBody>
+                  <a:tcPr anchor="ctr" marL="109728" marR="91440" marT="36576" marB="36576">
+                    <a:solidFill>
+                      <a:srgbClr val="FFFFFF"/>
+                    </a:solidFill>
+                  </a:tcPr>
+                </a:tc>
+                <a:tc>
+                  <a:txBody>
+                    <a:bodyPr/>
+                    <a:lstStyle/>
+                    <a:p>
+                      <a:pPr algn="l"/>
+                      <a:r>
+                        <a:rPr sz="1100" b="1" i="0">
+                          <a:solidFill>
+                            <a:srgbClr val="2B2B2B"/>
+                          </a:solidFill>
+                          <a:latin typeface="Calibri"/>
+                        </a:rPr>
+                        <a:t>ACA Final</a:t>
+                      </a:r>
+                      <a:r>
+                        <a:rPr sz="1100" b="0" i="0">
+                          <a:solidFill>
+                            <a:srgbClr val="2B2B2B"/>
+                          </a:solidFill>
+                          <a:latin typeface="Calibri"/>
+                        </a:rPr>
+                        <a:t> · Tarea · 32,8%</a:t>
+                      </a:r>
+                    </a:p>
+                  </a:txBody>
+                  <a:tcPr anchor="ctr" marL="109728" marR="91440" marT="36576" marB="36576">
+                    <a:solidFill>
+                      <a:srgbClr val="FFFFFF"/>
+                    </a:solidFill>
+                  </a:tcPr>
+                </a:tc>
+                <a:tc>
+                  <a:txBody>
+                    <a:bodyPr/>
+                    <a:lstStyle/>
+                    <a:p>
+                      <a:pPr algn="l"/>
+                      <a:r>
+                        <a:rPr sz="1100" b="0" i="0">
+                          <a:solidFill>
+                            <a:srgbClr val="2B2B2B"/>
+                          </a:solidFill>
+                          <a:latin typeface="Calibri"/>
+                        </a:rPr>
+                        <a:t>Sube el </a:t>
+                      </a:r>
+                      <a:r>
+                        <a:rPr sz="1100" b="1" i="0">
+                          <a:solidFill>
+                            <a:srgbClr val="2B2B2B"/>
+                          </a:solidFill>
+                          <a:latin typeface="Calibri"/>
+                        </a:rPr>
+                        <a:t>artículo consolidado</a:t>
+                      </a:r>
+                      <a:r>
+                        <a:rPr sz="1100" b="0" i="0">
+                          <a:solidFill>
+                            <a:srgbClr val="2B2B2B"/>
+                          </a:solidFill>
+                          <a:latin typeface="Calibri"/>
+                        </a:rPr>
+                        <a:t>: problema, pregunta, marco, matriz de fuentes y APA 7.</a:t>
+                      </a:r>
+                    </a:p>
+                  </a:txBody>
+                  <a:tcPr anchor="ctr" marL="109728" marR="91440" marT="36576" marB="36576">
+                    <a:solidFill>
+                      <a:srgbClr val="FFFFFF"/>
+                    </a:solidFill>
+                  </a:tcPr>
+                </a:tc>
+              </a:tr>
+              <a:tr h="477520">
+                <a:tc>
+                  <a:txBody>
+                    <a:bodyPr/>
+                    <a:lstStyle/>
+                    <a:p>
+                      <a:pPr algn="l"/>
+                      <a:r>
+                        <a:rPr sz="1100" b="1" i="0">
+                          <a:solidFill>
+                            <a:srgbClr val="2B2B2B"/>
+                          </a:solidFill>
+                          <a:latin typeface="Calibri"/>
+                        </a:rPr>
+                        <a:t>Sesión 05</a:t>
+                      </a:r>
+                      <a:r>
+                        <a:rPr sz="1100" b="0" i="0">
+                          <a:solidFill>
+                            <a:srgbClr val="2B2B2B"/>
+                          </a:solidFill>
+                          <a:latin typeface="Calibri"/>
+                        </a:rPr>
+                        <a:t> · pendiente</a:t>
+                      </a:r>
+                    </a:p>
+                  </a:txBody>
+                  <a:tcPr anchor="ctr" marL="109728" marR="91440" marT="36576" marB="36576">
+                    <a:solidFill>
+                      <a:srgbClr val="F2F2F2"/>
+                    </a:solidFill>
+                  </a:tcPr>
+                </a:tc>
+                <a:tc>
+                  <a:txBody>
+                    <a:bodyPr/>
+                    <a:lstStyle/>
+                    <a:p>
+                      <a:pPr algn="l"/>
+                      <a:r>
+                        <a:rPr sz="1100" b="1" i="0">
+                          <a:solidFill>
+                            <a:srgbClr val="2B2B2B"/>
+                          </a:solidFill>
+                          <a:latin typeface="Calibri"/>
+                        </a:rPr>
+                        <a:t>Quiz 3</a:t>
+                      </a:r>
+                      <a:r>
+                        <a:rPr sz="1100" b="0" i="0">
+                          <a:solidFill>
+                            <a:srgbClr val="2B2B2B"/>
+                          </a:solidFill>
+                          <a:latin typeface="Calibri"/>
+                        </a:rPr>
+                        <a:t> · Cuestionario · 4%</a:t>
+                      </a:r>
+                    </a:p>
+                  </a:txBody>
+                  <a:tcPr anchor="ctr" marL="109728" marR="91440" marT="36576" marB="36576">
+                    <a:solidFill>
+                      <a:srgbClr val="F2F2F2"/>
+                    </a:solidFill>
+                  </a:tcPr>
+                </a:tc>
+                <a:tc>
+                  <a:txBody>
+                    <a:bodyPr/>
+                    <a:lstStyle/>
+                    <a:p>
+                      <a:pPr algn="l"/>
+                      <a:r>
+                        <a:rPr sz="1100" b="0" i="0">
+                          <a:solidFill>
+                            <a:srgbClr val="2B2B2B"/>
+                          </a:solidFill>
+                          <a:latin typeface="Calibri"/>
+                        </a:rPr>
+                        <a:t>Ten claras las partes del </a:t>
+                      </a:r>
+                      <a:r>
+                        <a:rPr sz="1100" b="1" i="0">
+                          <a:solidFill>
+                            <a:srgbClr val="2B2B2B"/>
+                          </a:solidFill>
+                          <a:latin typeface="Calibri"/>
+                        </a:rPr>
+                        <a:t>planteamiento</a:t>
+                      </a:r>
+                      <a:r>
+                        <a:rPr sz="1100" b="0" i="0">
+                          <a:solidFill>
+                            <a:srgbClr val="2B2B2B"/>
+                          </a:solidFill>
+                          <a:latin typeface="Calibri"/>
+                        </a:rPr>
+                        <a:t> y qué es una revisión de literatura articulada.</a:t>
+                      </a:r>
+                    </a:p>
+                  </a:txBody>
+                  <a:tcPr anchor="ctr" marL="109728" marR="91440" marT="36576" marB="36576">
+                    <a:solidFill>
+                      <a:srgbClr val="F2F2F2"/>
+                    </a:solidFill>
+                  </a:tcPr>
+                </a:tc>
+              </a:tr>
+              <a:tr h="477520">
+                <a:tc>
+                  <a:txBody>
+                    <a:bodyPr/>
+                    <a:lstStyle/>
+                    <a:p>
+                      <a:pPr algn="l"/>
+                      <a:r>
+                        <a:rPr sz="1100" b="1" i="0">
+                          <a:solidFill>
+                            <a:srgbClr val="2B2B2B"/>
+                          </a:solidFill>
+                          <a:latin typeface="Calibri"/>
+                        </a:rPr>
+                        <a:t>Sesión 06</a:t>
+                      </a:r>
+                      <a:r>
+                        <a:rPr sz="1100" b="0" i="0">
+                          <a:solidFill>
+                            <a:srgbClr val="2B2B2B"/>
+                          </a:solidFill>
+                          <a:latin typeface="Calibri"/>
+                        </a:rPr>
+                        <a:t> · pendiente</a:t>
+                      </a:r>
+                    </a:p>
+                  </a:txBody>
+                  <a:tcPr anchor="ctr" marL="109728" marR="91440" marT="36576" marB="36576">
+                    <a:solidFill>
+                      <a:srgbClr val="FFFFFF"/>
+                    </a:solidFill>
+                  </a:tcPr>
+                </a:tc>
+                <a:tc>
+                  <a:txBody>
+                    <a:bodyPr/>
+                    <a:lstStyle/>
+                    <a:p>
+                      <a:pPr algn="l"/>
+                      <a:r>
+                        <a:rPr sz="1100" b="1" i="0">
+                          <a:solidFill>
+                            <a:srgbClr val="2B2B2B"/>
+                          </a:solidFill>
+                          <a:latin typeface="Calibri"/>
+                        </a:rPr>
+                        <a:t>Autoevaluación</a:t>
+                      </a:r>
+                      <a:r>
+                        <a:rPr sz="1100" b="0" i="0">
+                          <a:solidFill>
+                            <a:srgbClr val="2B2B2B"/>
+                          </a:solidFill>
+                          <a:latin typeface="Calibri"/>
+                        </a:rPr>
+                        <a:t> · Cuestionario · 1,6%</a:t>
+                      </a:r>
+                    </a:p>
+                  </a:txBody>
+                  <a:tcPr anchor="ctr" marL="109728" marR="91440" marT="36576" marB="36576">
+                    <a:solidFill>
+                      <a:srgbClr val="FFFFFF"/>
+                    </a:solidFill>
+                  </a:tcPr>
+                </a:tc>
+                <a:tc>
+                  <a:txBody>
+                    <a:bodyPr/>
+                    <a:lstStyle/>
+                    <a:p>
+                      <a:pPr algn="l"/>
+                      <a:r>
+                        <a:rPr sz="1100" b="0" i="0">
+                          <a:solidFill>
+                            <a:srgbClr val="2B2B2B"/>
+                          </a:solidFill>
+                          <a:latin typeface="Calibri"/>
+                        </a:rPr>
+                        <a:t>Diligénciala tú, según tu </a:t>
+                      </a:r>
+                      <a:r>
+                        <a:rPr sz="1100" b="1" i="0">
+                          <a:solidFill>
+                            <a:srgbClr val="2B2B2B"/>
+                          </a:solidFill>
+                          <a:latin typeface="Calibri"/>
+                        </a:rPr>
+                        <a:t>participación real</a:t>
+                      </a:r>
+                      <a:r>
+                        <a:rPr sz="1100" b="0" i="0">
+                          <a:solidFill>
+                            <a:srgbClr val="2B2B2B"/>
+                          </a:solidFill>
+                          <a:latin typeface="Calibri"/>
+                        </a:rPr>
+                        <a:t> en el periodo.</a:t>
+                      </a:r>
+                    </a:p>
+                  </a:txBody>
+                  <a:tcPr anchor="ctr" marL="109728" marR="91440" marT="36576" marB="36576">
+                    <a:solidFill>
+                      <a:srgbClr val="FFFFFF"/>
+                    </a:solidFill>
+                  </a:tcPr>
+                </a:tc>
+              </a:tr>
+              <a:tr h="477520">
+                <a:tc>
+                  <a:txBody>
+                    <a:bodyPr/>
+                    <a:lstStyle/>
+                    <a:p>
+                      <a:pPr algn="l"/>
+                      <a:r>
+                        <a:rPr sz="1100" b="1" i="0">
+                          <a:solidFill>
+                            <a:srgbClr val="2B2B2B"/>
+                          </a:solidFill>
+                          <a:latin typeface="Calibri"/>
+                        </a:rPr>
+                        <a:t>Sesión 06</a:t>
+                      </a:r>
+                      <a:r>
+                        <a:rPr sz="1100" b="0" i="0">
+                          <a:solidFill>
+                            <a:srgbClr val="2B2B2B"/>
+                          </a:solidFill>
+                          <a:latin typeface="Calibri"/>
+                        </a:rPr>
+                        <a:t> · pendiente</a:t>
+                      </a:r>
+                    </a:p>
+                  </a:txBody>
+                  <a:tcPr anchor="ctr" marL="109728" marR="91440" marT="36576" marB="36576">
+                    <a:solidFill>
+                      <a:srgbClr val="F2F2F2"/>
+                    </a:solidFill>
+                  </a:tcPr>
+                </a:tc>
+                <a:tc>
+                  <a:txBody>
+                    <a:bodyPr/>
+                    <a:lstStyle/>
+                    <a:p>
+                      <a:pPr algn="l"/>
+                      <a:r>
+                        <a:rPr sz="1100" b="1" i="0">
+                          <a:solidFill>
+                            <a:srgbClr val="2B2B2B"/>
+                          </a:solidFill>
+                          <a:latin typeface="Calibri"/>
+                        </a:rPr>
+                        <a:t>Coevaluación</a:t>
+                      </a:r>
+                      <a:r>
+                        <a:rPr sz="1100" b="0" i="0">
+                          <a:solidFill>
+                            <a:srgbClr val="2B2B2B"/>
+                          </a:solidFill>
+                          <a:latin typeface="Calibri"/>
+                        </a:rPr>
+                        <a:t> · Foro · 1,6%</a:t>
+                      </a:r>
+                    </a:p>
+                  </a:txBody>
+                  <a:tcPr anchor="ctr" marL="109728" marR="91440" marT="36576" marB="36576">
+                    <a:solidFill>
+                      <a:srgbClr val="F2F2F2"/>
+                    </a:solidFill>
+                  </a:tcPr>
+                </a:tc>
+                <a:tc>
+                  <a:txBody>
+                    <a:bodyPr/>
+                    <a:lstStyle/>
+                    <a:p>
+                      <a:pPr algn="l"/>
+                      <a:r>
+                        <a:rPr sz="1100" b="1" i="0">
+                          <a:solidFill>
+                            <a:srgbClr val="2B2B2B"/>
+                          </a:solidFill>
+                          <a:latin typeface="Calibri"/>
+                        </a:rPr>
+                        <a:t>Publica tu aporte</a:t>
+                      </a:r>
+                      <a:r>
+                        <a:rPr sz="1100" b="0" i="0">
+                          <a:solidFill>
+                            <a:srgbClr val="2B2B2B"/>
+                          </a:solidFill>
+                          <a:latin typeface="Calibri"/>
+                        </a:rPr>
+                        <a:t>: valora con respeto hechos del trabajo del equipo, no personas.</a:t>
+                      </a:r>
+                    </a:p>
+                  </a:txBody>
+                  <a:tcPr anchor="ctr" marL="109728" marR="91440" marT="36576" marB="36576">
+                    <a:solidFill>
+                      <a:srgbClr val="F2F2F2"/>
+                    </a:solidFill>
+                  </a:tcPr>
+                </a:tc>
+              </a:tr>
+            </a:tbl>
+          </a:graphicData>
+        </a:graphic>
+      </p:graphicFrame>
+      <p:sp>
+        <p:nvSpPr>
+          <p:cNvPr id="6" name="TextBox 5"/>
+          <p:cNvSpPr txBox="1"/>
+          <p:nvPr/>
+        </p:nvSpPr>
+        <p:spPr>
+          <a:xfrm>
+            <a:off x="640080" y="6080760"/>
+            <a:ext cx="10911535" cy="548640"/>
+          </a:xfrm>
+          <a:prstGeom prst="rect">
+            <a:avLst/>
+          </a:prstGeom>
+          <a:noFill/>
+        </p:spPr>
+        <p:txBody>
+          <a:bodyPr wrap="square" anchor="t" lIns="0" rIns="0" tIns="0" bIns="0">
+            <a:spAutoFit/>
+          </a:bodyPr>
+          <a:lstStyle/>
+          <a:p>
+            <a:r>
+              <a:rPr sz="1200" b="0" i="1">
+                <a:solidFill>
+                  <a:srgbClr val="2B2B2B"/>
+                </a:solidFill>
+                <a:latin typeface="Calibri"/>
+              </a:rPr>
+              <a:t>Esta misma tabla va al final de todas las sesiones. La </a:t>
+            </a:r>
+            <a:r>
+              <a:rPr sz="1200" b="1" i="1">
+                <a:solidFill>
+                  <a:srgbClr val="2B2B2B"/>
+                </a:solidFill>
+                <a:latin typeface="Calibri"/>
+              </a:rPr>
+              <a:t>fecha</a:t>
+            </a:r>
+            <a:r>
+              <a:rPr sz="1200" b="0" i="1">
+                <a:solidFill>
+                  <a:srgbClr val="2B2B2B"/>
+                </a:solidFill>
+                <a:latin typeface="Calibri"/>
+              </a:rPr>
+              <a:t> de cada ventana está en el enunciado del ítem (`Clases/Recursos/ACAs/`) y en el aula: si el aula y cualquier otro material se contradicen, </a:t>
+            </a:r>
+            <a:r>
+              <a:rPr sz="1200" b="1" i="1">
+                <a:solidFill>
+                  <a:srgbClr val="2B2B2B"/>
+                </a:solidFill>
+                <a:latin typeface="Calibri"/>
+              </a:rPr>
+              <a:t>manda el aula</a:t>
+            </a:r>
+            <a:r>
+              <a:rPr sz="1200" b="0" i="1">
+                <a:solidFill>
+                  <a:srgbClr val="2B2B2B"/>
+                </a:solidFill>
+                <a:latin typeface="Calibri"/>
+              </a:rPr>
+              <a:t>.</a:t>
+            </a:r>
+          </a:p>
+        </p:txBody>
+      </p:sp>
+      <p:sp>
+        <p:nvSpPr>
+          <p:cNvPr id="7" name="TextBox 6"/>
+          <p:cNvSpPr txBox="1"/>
+          <p:nvPr/>
+        </p:nvSpPr>
+        <p:spPr>
+          <a:xfrm>
+            <a:off x="11094415" y="6446520"/>
+            <a:ext cx="548640" cy="274320"/>
+          </a:xfrm>
+          <a:prstGeom prst="rect">
+            <a:avLst/>
+          </a:prstGeom>
+          <a:noFill/>
+        </p:spPr>
+        <p:txBody>
+          <a:bodyPr wrap="square" anchor="t" lIns="0" rIns="0" tIns="0" bIns="0">
+            <a:spAutoFit/>
+          </a:bodyPr>
+          <a:lstStyle/>
+          <a:p>
+            <a:pPr algn="r"/>
+            <a:r>
+              <a:rPr sz="1000" b="1" i="0">
+                <a:solidFill>
+                  <a:srgbClr val="8F989D"/>
+                </a:solidFill>
+                <a:latin typeface="Calibri"/>
+              </a:rPr>
+              <a:t>20</a:t>
+            </a:r>
+          </a:p>
+        </p:txBody>
+      </p:sp>
+    </p:spTree>
+  </p:cSld>
+  <p:clrMapOvr>
+    <a:masterClrMapping/>
+  </p:clrMapOvr>
+</p:sld>
+</file>
+
+<file path=ppt/slides/slide21.xml><?xml version="1.0" encoding="utf-8"?>
 <p:sld xmlns:a="http://schemas.openxmlformats.org/drawingml/2006/main" xmlns:p="http://schemas.openxmlformats.org/presentationml/2006/main" xmlns:r="http://schemas.openxmlformats.org/officeDocument/2006/relationships">
   <p:cSld>
     <p:bg>
@@ -7362,457 +9572,6 @@
                 <a:latin typeface="Calibri"/>
               </a:rPr>
               <a:t>INVESTIGACIÓN, CIENCIA Y TECNOLOGÍA</a:t>
-            </a:r>
-          </a:p>
-        </p:txBody>
-      </p:sp>
-    </p:spTree>
-  </p:cSld>
-  <p:clrMapOvr>
-    <a:masterClrMapping/>
-  </p:clrMapOvr>
-</p:sld>
-</file>
-
-<file path=ppt/slides/slide2.xml><?xml version="1.0" encoding="utf-8"?>
-<p:sld xmlns:a="http://schemas.openxmlformats.org/drawingml/2006/main" xmlns:p="http://schemas.openxmlformats.org/presentationml/2006/main" xmlns:r="http://schemas.openxmlformats.org/officeDocument/2006/relationships">
-  <p:cSld>
-    <p:bg>
-      <p:bgPr>
-        <a:solidFill>
-          <a:srgbClr val="FFFFFF"/>
-        </a:solidFill>
-        <a:effectLst/>
-      </p:bgPr>
-    </p:bg>
-    <p:spTree>
-      <p:nvGrpSpPr>
-        <p:cNvPr id="1" name=""/>
-        <p:cNvGrpSpPr/>
-        <p:nvPr/>
-      </p:nvGrpSpPr>
-      <p:grpSpPr/>
-      <p:sp>
-        <p:nvSpPr>
-          <p:cNvPr id="2" name="Rectangle 1"/>
-          <p:cNvSpPr/>
-          <p:nvPr/>
-        </p:nvSpPr>
-        <p:spPr>
-          <a:xfrm>
-            <a:off x="0" y="0"/>
-            <a:ext cx="12191695" cy="1188720"/>
-          </a:xfrm>
-          <a:prstGeom prst="rect">
-            <a:avLst/>
-          </a:prstGeom>
-          <a:solidFill>
-            <a:srgbClr val="0C2340"/>
-          </a:solidFill>
-          <a:ln>
-            <a:noFill/>
-          </a:ln>
-          <a:effectLst/>
-        </p:spPr>
-        <p:style>
-          <a:lnRef idx="1">
-            <a:schemeClr val="accent1"/>
-          </a:lnRef>
-          <a:fillRef idx="3">
-            <a:schemeClr val="accent1"/>
-          </a:fillRef>
-          <a:effectRef idx="2">
-            <a:schemeClr val="accent1"/>
-          </a:effectRef>
-          <a:fontRef idx="minor">
-            <a:schemeClr val="lt1"/>
-          </a:fontRef>
-        </p:style>
-        <p:txBody>
-          <a:bodyPr rtlCol="0" anchor="ctr"/>
-          <a:lstStyle/>
-          <a:p>
-            <a:pPr algn="ctr"/>
-          </a:p>
-        </p:txBody>
-      </p:sp>
-      <p:sp>
-        <p:nvSpPr>
-          <p:cNvPr id="3" name="TextBox 2"/>
-          <p:cNvSpPr txBox="1"/>
-          <p:nvPr/>
-        </p:nvSpPr>
-        <p:spPr>
-          <a:xfrm>
-            <a:off x="640080" y="0"/>
-            <a:ext cx="9082735" cy="1188720"/>
-          </a:xfrm>
-          <a:prstGeom prst="rect">
-            <a:avLst/>
-          </a:prstGeom>
-          <a:noFill/>
-        </p:spPr>
-        <p:txBody>
-          <a:bodyPr wrap="square" anchor="ctr" lIns="0" rIns="0" tIns="0" bIns="0">
-            <a:spAutoFit/>
-          </a:bodyPr>
-          <a:lstStyle/>
-          <a:p>
-            <a:pPr algn="ctr"/>
-            <a:r>
-              <a:rPr sz="2600" b="1" i="0">
-                <a:solidFill>
-                  <a:srgbClr val="FFFFFF"/>
-                </a:solidFill>
-                <a:latin typeface="Calibri"/>
-              </a:rPr>
-              <a:t>Su tema todavía no tiene apellido</a:t>
-            </a:r>
-          </a:p>
-        </p:txBody>
-      </p:sp>
-      <p:sp>
-        <p:nvSpPr>
-          <p:cNvPr id="4" name="TextBox 3"/>
-          <p:cNvSpPr txBox="1"/>
-          <p:nvPr/>
-        </p:nvSpPr>
-        <p:spPr>
-          <a:xfrm>
-            <a:off x="640080" y="1691639"/>
-            <a:ext cx="10911535" cy="4617720"/>
-          </a:xfrm>
-          <a:prstGeom prst="rect">
-            <a:avLst/>
-          </a:prstGeom>
-          <a:noFill/>
-        </p:spPr>
-        <p:txBody>
-          <a:bodyPr wrap="square" anchor="t" lIns="0" rIns="0" tIns="0" bIns="0">
-            <a:spAutoFit/>
-          </a:bodyPr>
-          <a:lstStyle/>
-          <a:p>
-            <a:pPr>
-              <a:spcAft>
-                <a:spcPts val="1000"/>
-              </a:spcAft>
-            </a:pPr>
-            <a:r>
-              <a:rPr sz="1600" b="0" i="0">
-                <a:solidFill>
-                  <a:srgbClr val="2B2B2B"/>
-                </a:solidFill>
-                <a:latin typeface="Calibri"/>
-              </a:rPr>
-              <a:t>–   En la sesión anterior cada uno dejó un </a:t>
-            </a:r>
-            <a:r>
-              <a:rPr sz="1600" b="1" i="0">
-                <a:solidFill>
-                  <a:srgbClr val="2B2B2B"/>
-                </a:solidFill>
-                <a:latin typeface="Calibri"/>
-              </a:rPr>
-              <a:t>tema tentativo</a:t>
-            </a:r>
-            <a:r>
-              <a:rPr sz="1600" b="0" i="0">
-                <a:solidFill>
-                  <a:srgbClr val="2B2B2B"/>
-                </a:solidFill>
-                <a:latin typeface="Calibri"/>
-              </a:rPr>
-              <a:t>: "phishing", "deserción", "la red del laboratorio".</a:t>
-            </a:r>
-          </a:p>
-          <a:p>
-            <a:pPr>
-              <a:spcAft>
-                <a:spcPts val="1000"/>
-              </a:spcAft>
-            </a:pPr>
-            <a:r>
-              <a:rPr sz="1600" b="0" i="0">
-                <a:solidFill>
-                  <a:srgbClr val="2B2B2B"/>
-                </a:solidFill>
-                <a:latin typeface="Calibri"/>
-              </a:rPr>
-              <a:t>–   Un tema suelto no se puede investigar: </a:t>
-            </a:r>
-            <a:r>
-              <a:rPr sz="1600" b="1" i="0">
-                <a:solidFill>
-                  <a:srgbClr val="2B2B2B"/>
-                </a:solidFill>
-                <a:latin typeface="Calibri"/>
-              </a:rPr>
-              <a:t>no dice dónde buscar, ni con quién dialogar, ni con qué palabras</a:t>
-            </a:r>
-            <a:r>
-              <a:rPr sz="1600" b="0" i="0">
-                <a:solidFill>
-                  <a:srgbClr val="2B2B2B"/>
-                </a:solidFill>
-                <a:latin typeface="Calibri"/>
-              </a:rPr>
-              <a:t>.</a:t>
-            </a:r>
-          </a:p>
-          <a:p>
-            <a:pPr>
-              <a:spcAft>
-                <a:spcPts val="1000"/>
-              </a:spcAft>
-            </a:pPr>
-            <a:r>
-              <a:rPr sz="1600" b="0" i="0">
-                <a:solidFill>
-                  <a:srgbClr val="2B2B2B"/>
-                </a:solidFill>
-                <a:latin typeface="Calibri"/>
-              </a:rPr>
-              <a:t>–   Hoy le ponemos apellido: lo ubicamos en una </a:t>
-            </a:r>
-            <a:r>
-              <a:rPr sz="1600" b="1" i="0">
-                <a:solidFill>
-                  <a:srgbClr val="2B2B2B"/>
-                </a:solidFill>
-                <a:latin typeface="Calibri"/>
-              </a:rPr>
-              <a:t>línea de investigación</a:t>
-            </a:r>
-            <a:r>
-              <a:rPr sz="1600" b="0" i="0">
-                <a:solidFill>
-                  <a:srgbClr val="2B2B2B"/>
-                </a:solidFill>
-                <a:latin typeface="Calibri"/>
-              </a:rPr>
-              <a:t>.</a:t>
-            </a:r>
-          </a:p>
-          <a:p>
-            <a:pPr>
-              <a:spcAft>
-                <a:spcPts val="1000"/>
-              </a:spcAft>
-            </a:pPr>
-            <a:r>
-              <a:rPr sz="1600" b="0" i="0">
-                <a:solidFill>
-                  <a:srgbClr val="2B2B2B"/>
-                </a:solidFill>
-                <a:latin typeface="Calibri"/>
-              </a:rPr>
-              <a:t>–   Caso concreto: dos estudiantes escriben "seguridad informática".</a:t>
-            </a:r>
-          </a:p>
-          <a:p>
-            <a:pPr lvl="1">
-              <a:spcAft>
-                <a:spcPts val="600"/>
-              </a:spcAft>
-            </a:pPr>
-            <a:r>
-              <a:rPr sz="1500" b="0" i="0">
-                <a:solidFill>
-                  <a:srgbClr val="2B2B2B"/>
-                </a:solidFill>
-                <a:latin typeface="Calibri"/>
-              </a:rPr>
-              <a:t>●   El primero la trabaja como </a:t>
-            </a:r>
-            <a:r>
-              <a:rPr sz="1500" b="1" i="0">
-                <a:solidFill>
-                  <a:srgbClr val="2B2B2B"/>
-                </a:solidFill>
-                <a:latin typeface="Calibri"/>
-              </a:rPr>
-              <a:t>Inteligencia Artificial</a:t>
-            </a:r>
-            <a:r>
-              <a:rPr sz="1500" b="0" i="0">
-                <a:solidFill>
-                  <a:srgbClr val="2B2B2B"/>
-                </a:solidFill>
-                <a:latin typeface="Calibri"/>
-              </a:rPr>
-              <a:t> → busca *phishing detection*, *classifier*, *dataset*.</a:t>
-            </a:r>
-          </a:p>
-          <a:p>
-            <a:pPr lvl="1">
-              <a:spcAft>
-                <a:spcPts val="600"/>
-              </a:spcAft>
-            </a:pPr>
-            <a:r>
-              <a:rPr sz="1500" b="0" i="0">
-                <a:solidFill>
-                  <a:srgbClr val="2B2B2B"/>
-                </a:solidFill>
-                <a:latin typeface="Calibri"/>
-              </a:rPr>
-              <a:t>●   El segundo la trabaja como </a:t>
-            </a:r>
-            <a:r>
-              <a:rPr sz="1500" b="1" i="0">
-                <a:solidFill>
-                  <a:srgbClr val="2B2B2B"/>
-                </a:solidFill>
-                <a:latin typeface="Calibri"/>
-              </a:rPr>
-              <a:t>Telemática</a:t>
-            </a:r>
-            <a:r>
-              <a:rPr sz="1500" b="0" i="0">
-                <a:solidFill>
-                  <a:srgbClr val="2B2B2B"/>
-                </a:solidFill>
-                <a:latin typeface="Calibri"/>
-              </a:rPr>
-              <a:t> → busca *firewall*, *segmentación de red*, *latencia*.</a:t>
-            </a:r>
-          </a:p>
-          <a:p>
-            <a:pPr lvl="1">
-              <a:spcAft>
-                <a:spcPts val="600"/>
-              </a:spcAft>
-            </a:pPr>
-            <a:r>
-              <a:rPr sz="1500" b="0" i="0">
-                <a:solidFill>
-                  <a:srgbClr val="2B2B2B"/>
-                </a:solidFill>
-                <a:latin typeface="Calibri"/>
-              </a:rPr>
-              <a:t>●   Mismo tema, </a:t>
-            </a:r>
-            <a:r>
-              <a:rPr sz="1500" b="1" i="0">
-                <a:solidFill>
-                  <a:srgbClr val="2B2B2B"/>
-                </a:solidFill>
-                <a:latin typeface="Calibri"/>
-              </a:rPr>
-              <a:t>dos bibliografías que casi no se cruzan</a:t>
-            </a:r>
-            <a:r>
-              <a:rPr sz="1500" b="0" i="0">
-                <a:solidFill>
-                  <a:srgbClr val="2B2B2B"/>
-                </a:solidFill>
-                <a:latin typeface="Calibri"/>
-              </a:rPr>
-              <a:t> y dos artículos distintos.</a:t>
-            </a:r>
-          </a:p>
-          <a:p>
-            <a:pPr>
-              <a:spcAft>
-                <a:spcPts val="1000"/>
-              </a:spcAft>
-            </a:pPr>
-            <a:r>
-              <a:rPr sz="1600" b="0" i="0">
-                <a:solidFill>
-                  <a:srgbClr val="2B2B2B"/>
-                </a:solidFill>
-                <a:latin typeface="Calibri"/>
-              </a:rPr>
-              <a:t>–   Elegir bien la línea le ahorra semanas de búsqueda perdida; elegirla mal lo obliga a reescribir el marco.</a:t>
-            </a:r>
-          </a:p>
-        </p:txBody>
-      </p:sp>
-      <p:sp>
-        <p:nvSpPr>
-          <p:cNvPr id="5" name="TextBox 4"/>
-          <p:cNvSpPr txBox="1"/>
-          <p:nvPr/>
-        </p:nvSpPr>
-        <p:spPr>
-          <a:xfrm>
-            <a:off x="11094415" y="6446520"/>
-            <a:ext cx="548640" cy="274320"/>
-          </a:xfrm>
-          <a:prstGeom prst="rect">
-            <a:avLst/>
-          </a:prstGeom>
-          <a:noFill/>
-        </p:spPr>
-        <p:txBody>
-          <a:bodyPr wrap="square" anchor="t" lIns="0" rIns="0" tIns="0" bIns="0">
-            <a:spAutoFit/>
-          </a:bodyPr>
-          <a:lstStyle/>
-          <a:p>
-            <a:pPr algn="r"/>
-            <a:r>
-              <a:rPr sz="1000" b="1" i="0">
-                <a:solidFill>
-                  <a:srgbClr val="8F989D"/>
-                </a:solidFill>
-                <a:latin typeface="Calibri"/>
-              </a:rPr>
-              <a:t>2</a:t>
-            </a:r>
-          </a:p>
-        </p:txBody>
-      </p:sp>
-      <p:sp>
-        <p:nvSpPr>
-          <p:cNvPr id="6" name="TextBox 5"/>
-          <p:cNvSpPr txBox="1"/>
-          <p:nvPr/>
-        </p:nvSpPr>
-        <p:spPr>
-          <a:xfrm>
-            <a:off x="640080" y="5943600"/>
-            <a:ext cx="9997135" cy="457200"/>
-          </a:xfrm>
-          <a:prstGeom prst="rect">
-            <a:avLst/>
-          </a:prstGeom>
-          <a:noFill/>
-        </p:spPr>
-        <p:txBody>
-          <a:bodyPr wrap="square" anchor="t" lIns="0" rIns="0" tIns="0" bIns="0">
-            <a:spAutoFit/>
-          </a:bodyPr>
-          <a:lstStyle/>
-          <a:p>
-            <a:r>
-              <a:rPr sz="1200" b="0" i="1">
-                <a:solidFill>
-                  <a:srgbClr val="2B2B2B"/>
-                </a:solidFill>
-                <a:latin typeface="Calibri"/>
-              </a:rPr>
-              <a:t>Al final de esta sesión usted sale con </a:t>
-            </a:r>
-            <a:r>
-              <a:rPr sz="1200" b="1" i="1">
-                <a:solidFill>
-                  <a:srgbClr val="2B2B2B"/>
-                </a:solidFill>
-                <a:latin typeface="Calibri"/>
-              </a:rPr>
-              <a:t>una línea elegida y justificada por escrito</a:t>
-            </a:r>
-            <a:r>
-              <a:rPr sz="1200" b="0" i="1">
-                <a:solidFill>
-                  <a:srgbClr val="2B2B2B"/>
-                </a:solidFill>
-                <a:latin typeface="Calibri"/>
-              </a:rPr>
-              <a:t>, no con una intención.</a:t>
             </a:r>
           </a:p>
         </p:txBody>
